--- a/downloads/chenghao_physical_ai_self_intro_en.pptx
+++ b/downloads/chenghao_physical_ai_self_intro_en.pptx
@@ -2,13 +2,13 @@
 <file path=ppt/presentation.xml><?xml version="1.0" encoding="utf-8"?>
 <p:presentation xmlns:p="http://schemas.openxmlformats.org/presentationml/2006/main">
   <p:sldMasterIdLst>
-    <p:sldMasterId xmlns:r="http://schemas.openxmlformats.org/officeDocument/2006/relationships" id="2147483648" r:id="Re5897a81115040d7"/>
+    <p:sldMasterId xmlns:r="http://schemas.openxmlformats.org/officeDocument/2006/relationships" id="2147483648" r:id="Rfae4b0cea297437e"/>
   </p:sldMasterIdLst>
   <p:notesMasterIdLst>
-    <p:notesMasterId xmlns:r="http://schemas.openxmlformats.org/officeDocument/2006/relationships" r:id="R2a70d325435b4629"/>
+    <p:notesMasterId xmlns:r="http://schemas.openxmlformats.org/officeDocument/2006/relationships" r:id="R75aca69d15804b0e"/>
   </p:notesMasterIdLst>
   <p:sldIdLst>
-    <p:sldId xmlns:r="http://schemas.openxmlformats.org/officeDocument/2006/relationships" id="256" r:id="R56b2cc9be12b48f5"/>
+    <p:sldId xmlns:r="http://schemas.openxmlformats.org/officeDocument/2006/relationships" id="256" r:id="Rc6b5742e18354a9b"/>
   </p:sldIdLst>
   <p:sldSz cx="12192000" cy="6858000"/>
   <p:notesSz cx="6858000" cy="9144000"/>
@@ -497,7 +497,7 @@
           </a:p>
           <a:p xmlns:a="http://schemas.openxmlformats.org/drawingml/2006/main">
             <a:r>
-              <a:t>Biography and operating figures supplied by the presenter. Background: AI-generated concept illustration, not a product photograph.</a:t>
+              <a:t>Biography and operating figures supplied by the presenter. Brand illustration: Nuri, the approved AI-generated cloud-fox companion. Original illustration reused without redesign.</a:t>
             </a:r>
           </a:p>
         </p:txBody>
@@ -565,7 +565,7 @@
   </p:cSld>
   <p:clrMap bg1="lt1" tx1="dk1" bg2="lt2" tx2="dk2" accent1="accent1" accent2="accent2" accent3="accent3" accent4="accent4" accent5="accent5" accent6="accent6" hlink="hlink" folHlink="folHlink"/>
   <p:sldLayoutIdLst>
-    <p:sldLayoutId xmlns:r="http://schemas.openxmlformats.org/officeDocument/2006/relationships" id="2147483649" r:id="R268bb1e481144892"/>
+    <p:sldLayoutId xmlns:r="http://schemas.openxmlformats.org/officeDocument/2006/relationships" id="2147483649" r:id="R53c0d98f5ab3406d"/>
   </p:sldLayoutIdLst>
   <p:txStyles>
     <p:titleStyle>
@@ -1098,7 +1098,7 @@
     <p:bg>
       <p:bgPr>
         <a:solidFill xmlns:a="http://schemas.openxmlformats.org/drawingml/2006/main">
-          <a:srgbClr val="F7FBFF"/>
+          <a:srgbClr val="F5F0E5"/>
         </a:solidFill>
       </p:bgPr>
     </p:bg>
@@ -1111,124 +1111,6 @@
       <p:grpSpPr>
         <a:xfrm xmlns:a="http://schemas.openxmlformats.org/drawingml/2006/main"/>
       </p:grpSpPr>
-      <p:pic>
-        <p:nvPicPr>
-          <p:cNvPr id="25" name=""/>
-          <p:cNvPicPr>
-            <a:picLocks xmlns:a="http://schemas.openxmlformats.org/drawingml/2006/main" noChangeAspect="1"/>
-          </p:cNvPicPr>
-          <p:nvPr/>
-        </p:nvPicPr>
-        <p:blipFill>
-          <a:blip xmlns:r="http://schemas.openxmlformats.org/officeDocument/2006/relationships" xmlns:a="http://schemas.openxmlformats.org/drawingml/2006/main" r:embed="Rad26b21b6e764d22"/>
-          <a:srcRect xmlns:a="http://schemas.openxmlformats.org/drawingml/2006/main" l="0" t="27" r="0" b="27"/>
-          <a:stretch xmlns:a="http://schemas.openxmlformats.org/drawingml/2006/main">
-            <a:fillRect l="0" t="0" r="0" b="0"/>
-          </a:stretch>
-        </p:blipFill>
-        <p:spPr>
-          <a:xfrm xmlns:a="http://schemas.openxmlformats.org/drawingml/2006/main">
-            <a:off x="0" y="0"/>
-            <a:ext cx="12192000" cy="6858000"/>
-          </a:xfrm>
-          <a:prstGeom xmlns:a="http://schemas.openxmlformats.org/drawingml/2006/main" prst="rect">
-            <a:avLst/>
-          </a:prstGeom>
-        </p:spPr>
-      </p:pic>
-      <p:sp>
-        <p:nvSpPr>
-          <p:cNvPr id="2" name="left-readability-gradient">
-            <a:extLst xmlns:a="http://schemas.openxmlformats.org/drawingml/2006/main">
-              <a:ext uri="{FF2B5EF4-FFF2-40B4-BE49-F238E27FC236}">
-                <a16:creationId xmlns:a16="http://schemas.microsoft.com/office/drawing/2014/main" id="{72970C16-EAFD-4E7B-BA53-27E52A6437A7}"/>
-              </a:ext>
-            </a:extLst>
-          </p:cNvPr>
-          <p:cNvSpPr>
-            <a:spLocks xmlns:a="http://schemas.openxmlformats.org/drawingml/2006/main" noGrp="1"/>
-          </p:cNvSpPr>
-          <p:nvPr/>
-        </p:nvSpPr>
-        <p:spPr>
-          <a:xfrm xmlns:a="http://schemas.openxmlformats.org/drawingml/2006/main">
-            <a:off x="0" y="0"/>
-            <a:ext cx="8286750" cy="6858000"/>
-          </a:xfrm>
-          <a:prstGeom xmlns:a="http://schemas.openxmlformats.org/drawingml/2006/main" prst="rect">
-            <a:avLst/>
-          </a:prstGeom>
-          <a:gradFill xmlns:a="http://schemas.openxmlformats.org/drawingml/2006/main">
-            <a:gsLst>
-              <a:gs pos="0">
-                <a:srgbClr val="FFFFFF"/>
-              </a:gs>
-              <a:gs pos="58000">
-                <a:srgbClr val="FFFFFF">
-                  <a:alpha val="98000"/>
-                </a:srgbClr>
-              </a:gs>
-              <a:gs pos="78000">
-                <a:srgbClr val="FFFFFF">
-                  <a:alpha val="75000"/>
-                </a:srgbClr>
-              </a:gs>
-              <a:gs pos="100000">
-                <a:srgbClr val="FFFFFF">
-                  <a:alpha val="0"/>
-                </a:srgbClr>
-              </a:gs>
-            </a:gsLst>
-            <a:lin ang="5400000"/>
-          </a:gradFill>
-          <a:ln xmlns:a="http://schemas.openxmlformats.org/drawingml/2006/main" w="0">
-            <a:noFill/>
-            <a:prstDash val="solid"/>
-          </a:ln>
-        </p:spPr>
-      </p:sp>
-      <p:sp>
-        <p:nvSpPr>
-          <p:cNvPr id="3" name="bottom-blue-accent">
-            <a:extLst xmlns:a="http://schemas.openxmlformats.org/drawingml/2006/main">
-              <a:ext uri="{FF2B5EF4-FFF2-40B4-BE49-F238E27FC236}">
-                <a16:creationId xmlns:a16="http://schemas.microsoft.com/office/drawing/2014/main" id="{EF3CE949-8B9B-46CE-9BD9-EB7FF579EEE1}"/>
-              </a:ext>
-            </a:extLst>
-          </p:cNvPr>
-          <p:cNvSpPr>
-            <a:spLocks xmlns:a="http://schemas.openxmlformats.org/drawingml/2006/main" noGrp="1"/>
-          </p:cNvSpPr>
-          <p:nvPr/>
-        </p:nvSpPr>
-        <p:spPr>
-          <a:xfrm xmlns:a="http://schemas.openxmlformats.org/drawingml/2006/main">
-            <a:off x="0" y="6591300"/>
-            <a:ext cx="12192000" cy="266700"/>
-          </a:xfrm>
-          <a:prstGeom xmlns:a="http://schemas.openxmlformats.org/drawingml/2006/main" prst="rect">
-            <a:avLst/>
-          </a:prstGeom>
-          <a:gradFill xmlns:a="http://schemas.openxmlformats.org/drawingml/2006/main">
-            <a:gsLst>
-              <a:gs pos="0">
-                <a:srgbClr val="071957"/>
-              </a:gs>
-              <a:gs pos="50000">
-                <a:srgbClr val="1238C8"/>
-              </a:gs>
-              <a:gs pos="100000">
-                <a:srgbClr val="06B6D4"/>
-              </a:gs>
-            </a:gsLst>
-            <a:lin ang="5400000"/>
-          </a:gradFill>
-          <a:ln xmlns:a="http://schemas.openxmlformats.org/drawingml/2006/main" w="0">
-            <a:noFill/>
-            <a:prstDash val="solid"/>
-          </a:ln>
-        </p:spPr>
-      </p:sp>
       <p:sp>
         <p:nvSpPr>
           <p:cNvPr id="4" name="program-eyebrow">
@@ -1245,8 +1127,8 @@
         </p:nvSpPr>
         <p:spPr>
           <a:xfrm xmlns:a="http://schemas.openxmlformats.org/drawingml/2006/main">
-            <a:off x="666750" y="514350"/>
-            <a:ext cx="4953000" cy="285750"/>
+            <a:off x="609600" y="400050"/>
+            <a:ext cx="7810500" cy="304800"/>
           </a:xfrm>
           <a:prstGeom xmlns:a="http://schemas.openxmlformats.org/drawingml/2006/main" prst="rect">
             <a:avLst/>
@@ -1258,8 +1140,111 @@
           </a:ln>
         </p:spPr>
         <p:txBody>
-          <a:bodyPr xmlns:a="http://schemas.openxmlformats.org/drawingml/2006/main" wrap="square" lIns="0" tIns="0" rIns="0" bIns="0" anchor="t"/>
-          <a:lstStyle xmlns:a="http://schemas.openxmlformats.org/drawingml/2006/main"/>
+          <a:bodyPr xmlns:a="http://schemas.openxmlformats.org/drawingml/2006/main" wrap="square" lIns="0" tIns="0" rIns="0" bIns="0" anchor="t">
+            <a:noAutofit/>
+          </a:bodyPr>
+          <a:lstStyle xmlns:a="http://schemas.openxmlformats.org/drawingml/2006/main">
+            <a:defPPr algn="l">
+              <a:defRPr sz="1350" b="1">
+                <a:solidFill>
+                  <a:srgbClr val="2456D8"/>
+                </a:solidFill>
+                <a:latin typeface="Malgun Gothic"/>
+                <a:ea typeface="Malgun Gothic"/>
+                <a:cs typeface="Malgun Gothic"/>
+              </a:defRPr>
+            </a:defPPr>
+            <a:lvl1pPr algn="l">
+              <a:defRPr sz="1350" b="1">
+                <a:solidFill>
+                  <a:srgbClr val="2456D8"/>
+                </a:solidFill>
+                <a:latin typeface="Malgun Gothic"/>
+                <a:ea typeface="Malgun Gothic"/>
+                <a:cs typeface="Malgun Gothic"/>
+              </a:defRPr>
+            </a:lvl1pPr>
+            <a:lvl2pPr algn="l">
+              <a:defRPr sz="1350" b="1">
+                <a:solidFill>
+                  <a:srgbClr val="2456D8"/>
+                </a:solidFill>
+                <a:latin typeface="Malgun Gothic"/>
+                <a:ea typeface="Malgun Gothic"/>
+                <a:cs typeface="Malgun Gothic"/>
+              </a:defRPr>
+            </a:lvl2pPr>
+            <a:lvl3pPr algn="l">
+              <a:defRPr sz="1350" b="1">
+                <a:solidFill>
+                  <a:srgbClr val="2456D8"/>
+                </a:solidFill>
+                <a:latin typeface="Malgun Gothic"/>
+                <a:ea typeface="Malgun Gothic"/>
+                <a:cs typeface="Malgun Gothic"/>
+              </a:defRPr>
+            </a:lvl3pPr>
+            <a:lvl4pPr algn="l">
+              <a:defRPr sz="1350" b="1">
+                <a:solidFill>
+                  <a:srgbClr val="2456D8"/>
+                </a:solidFill>
+                <a:latin typeface="Malgun Gothic"/>
+                <a:ea typeface="Malgun Gothic"/>
+                <a:cs typeface="Malgun Gothic"/>
+              </a:defRPr>
+            </a:lvl4pPr>
+            <a:lvl5pPr algn="l">
+              <a:defRPr sz="1350" b="1">
+                <a:solidFill>
+                  <a:srgbClr val="2456D8"/>
+                </a:solidFill>
+                <a:latin typeface="Malgun Gothic"/>
+                <a:ea typeface="Malgun Gothic"/>
+                <a:cs typeface="Malgun Gothic"/>
+              </a:defRPr>
+            </a:lvl5pPr>
+            <a:lvl6pPr algn="l">
+              <a:defRPr sz="1350" b="1">
+                <a:solidFill>
+                  <a:srgbClr val="2456D8"/>
+                </a:solidFill>
+                <a:latin typeface="Malgun Gothic"/>
+                <a:ea typeface="Malgun Gothic"/>
+                <a:cs typeface="Malgun Gothic"/>
+              </a:defRPr>
+            </a:lvl6pPr>
+            <a:lvl7pPr algn="l">
+              <a:defRPr sz="1350" b="1">
+                <a:solidFill>
+                  <a:srgbClr val="2456D8"/>
+                </a:solidFill>
+                <a:latin typeface="Malgun Gothic"/>
+                <a:ea typeface="Malgun Gothic"/>
+                <a:cs typeface="Malgun Gothic"/>
+              </a:defRPr>
+            </a:lvl7pPr>
+            <a:lvl8pPr algn="l">
+              <a:defRPr sz="1350" b="1">
+                <a:solidFill>
+                  <a:srgbClr val="2456D8"/>
+                </a:solidFill>
+                <a:latin typeface="Malgun Gothic"/>
+                <a:ea typeface="Malgun Gothic"/>
+                <a:cs typeface="Malgun Gothic"/>
+              </a:defRPr>
+            </a:lvl8pPr>
+            <a:lvl9pPr algn="l">
+              <a:defRPr sz="1350" b="1">
+                <a:solidFill>
+                  <a:srgbClr val="2456D8"/>
+                </a:solidFill>
+                <a:latin typeface="Malgun Gothic"/>
+                <a:ea typeface="Malgun Gothic"/>
+                <a:cs typeface="Malgun Gothic"/>
+              </a:defRPr>
+            </a:lvl9pPr>
+          </a:lstStyle>
           <a:p xmlns:a="http://schemas.openxmlformats.org/drawingml/2006/main">
             <a:pPr algn="l">
               <a:lnSpc>
@@ -1268,7 +1253,7 @@
               <a:buNone/>
               <a:defRPr sz="1350" b="1">
                 <a:solidFill>
-                  <a:srgbClr val="1238C8"/>
+                  <a:srgbClr val="2456D8"/>
                 </a:solidFill>
                 <a:latin typeface="Malgun Gothic"/>
                 <a:ea typeface="Malgun Gothic"/>
@@ -1278,7 +1263,7 @@
             <a:r>
               <a:rPr sz="1350" b="1">
                 <a:solidFill>
-                  <a:srgbClr val="1238C8"/>
+                  <a:srgbClr val="2456D8"/>
                 </a:solidFill>
                 <a:latin typeface="Malgun Gothic"/>
                 <a:ea typeface="Malgun Gothic"/>
@@ -1305,8 +1290,8 @@
         </p:nvSpPr>
         <p:spPr>
           <a:xfrm xmlns:a="http://schemas.openxmlformats.org/drawingml/2006/main">
-            <a:off x="647700" y="990600"/>
-            <a:ext cx="6572250" cy="1733550"/>
+            <a:off x="571500" y="809625"/>
+            <a:ext cx="8096250" cy="742950"/>
           </a:xfrm>
           <a:prstGeom xmlns:a="http://schemas.openxmlformats.org/drawingml/2006/main" prst="rect">
             <a:avLst/>
@@ -1318,87 +1303,136 @@
           </a:ln>
         </p:spPr>
         <p:txBody>
-          <a:bodyPr xmlns:a="http://schemas.openxmlformats.org/drawingml/2006/main" wrap="square" lIns="0" tIns="0" rIns="0" bIns="0" anchor="t"/>
-          <a:lstStyle xmlns:a="http://schemas.openxmlformats.org/drawingml/2006/main"/>
+          <a:bodyPr xmlns:a="http://schemas.openxmlformats.org/drawingml/2006/main" wrap="square" lIns="0" tIns="0" rIns="0" bIns="0" anchor="t">
+            <a:noAutofit/>
+          </a:bodyPr>
+          <a:lstStyle xmlns:a="http://schemas.openxmlformats.org/drawingml/2006/main">
+            <a:defPPr algn="l">
+              <a:defRPr sz="4350" b="1">
+                <a:solidFill>
+                  <a:srgbClr val="14243A"/>
+                </a:solidFill>
+                <a:latin typeface="Segoe UI"/>
+                <a:ea typeface="Segoe UI"/>
+                <a:cs typeface="Segoe UI"/>
+              </a:defRPr>
+            </a:defPPr>
+            <a:lvl1pPr algn="l">
+              <a:defRPr sz="4350" b="1">
+                <a:solidFill>
+                  <a:srgbClr val="14243A"/>
+                </a:solidFill>
+                <a:latin typeface="Segoe UI"/>
+                <a:ea typeface="Segoe UI"/>
+                <a:cs typeface="Segoe UI"/>
+              </a:defRPr>
+            </a:lvl1pPr>
+            <a:lvl2pPr algn="l">
+              <a:defRPr sz="4350" b="1">
+                <a:solidFill>
+                  <a:srgbClr val="14243A"/>
+                </a:solidFill>
+                <a:latin typeface="Segoe UI"/>
+                <a:ea typeface="Segoe UI"/>
+                <a:cs typeface="Segoe UI"/>
+              </a:defRPr>
+            </a:lvl2pPr>
+            <a:lvl3pPr algn="l">
+              <a:defRPr sz="4350" b="1">
+                <a:solidFill>
+                  <a:srgbClr val="14243A"/>
+                </a:solidFill>
+                <a:latin typeface="Segoe UI"/>
+                <a:ea typeface="Segoe UI"/>
+                <a:cs typeface="Segoe UI"/>
+              </a:defRPr>
+            </a:lvl3pPr>
+            <a:lvl4pPr algn="l">
+              <a:defRPr sz="4350" b="1">
+                <a:solidFill>
+                  <a:srgbClr val="14243A"/>
+                </a:solidFill>
+                <a:latin typeface="Segoe UI"/>
+                <a:ea typeface="Segoe UI"/>
+                <a:cs typeface="Segoe UI"/>
+              </a:defRPr>
+            </a:lvl4pPr>
+            <a:lvl5pPr algn="l">
+              <a:defRPr sz="4350" b="1">
+                <a:solidFill>
+                  <a:srgbClr val="14243A"/>
+                </a:solidFill>
+                <a:latin typeface="Segoe UI"/>
+                <a:ea typeface="Segoe UI"/>
+                <a:cs typeface="Segoe UI"/>
+              </a:defRPr>
+            </a:lvl5pPr>
+            <a:lvl6pPr algn="l">
+              <a:defRPr sz="4350" b="1">
+                <a:solidFill>
+                  <a:srgbClr val="14243A"/>
+                </a:solidFill>
+                <a:latin typeface="Segoe UI"/>
+                <a:ea typeface="Segoe UI"/>
+                <a:cs typeface="Segoe UI"/>
+              </a:defRPr>
+            </a:lvl6pPr>
+            <a:lvl7pPr algn="l">
+              <a:defRPr sz="4350" b="1">
+                <a:solidFill>
+                  <a:srgbClr val="14243A"/>
+                </a:solidFill>
+                <a:latin typeface="Segoe UI"/>
+                <a:ea typeface="Segoe UI"/>
+                <a:cs typeface="Segoe UI"/>
+              </a:defRPr>
+            </a:lvl7pPr>
+            <a:lvl8pPr algn="l">
+              <a:defRPr sz="4350" b="1">
+                <a:solidFill>
+                  <a:srgbClr val="14243A"/>
+                </a:solidFill>
+                <a:latin typeface="Segoe UI"/>
+                <a:ea typeface="Segoe UI"/>
+                <a:cs typeface="Segoe UI"/>
+              </a:defRPr>
+            </a:lvl8pPr>
+            <a:lvl9pPr algn="l">
+              <a:defRPr sz="4350" b="1">
+                <a:solidFill>
+                  <a:srgbClr val="14243A"/>
+                </a:solidFill>
+                <a:latin typeface="Segoe UI"/>
+                <a:ea typeface="Segoe UI"/>
+                <a:cs typeface="Segoe UI"/>
+              </a:defRPr>
+            </a:lvl9pPr>
+          </a:lstStyle>
           <a:p xmlns:a="http://schemas.openxmlformats.org/drawingml/2006/main">
             <a:pPr algn="l">
               <a:lnSpc>
                 <a:spcPct val="92000"/>
               </a:lnSpc>
               <a:buNone/>
-              <a:defRPr sz="3750" b="1">
-                <a:solidFill>
-                  <a:srgbClr val="061330"/>
-                </a:solidFill>
-                <a:latin typeface="Malgun Gothic"/>
-                <a:ea typeface="Malgun Gothic"/>
-                <a:cs typeface="Malgun Gothic"/>
+              <a:defRPr sz="4350" b="1">
+                <a:solidFill>
+                  <a:srgbClr val="14243A"/>
+                </a:solidFill>
+                <a:latin typeface="Segoe UI"/>
+                <a:ea typeface="Segoe UI"/>
+                <a:cs typeface="Segoe UI"/>
               </a:defRPr>
             </a:pPr>
             <a:r>
-              <a:rPr sz="3750" b="1">
-                <a:solidFill>
-                  <a:srgbClr val="061330"/>
-                </a:solidFill>
-                <a:latin typeface="Malgun Gothic"/>
-                <a:ea typeface="Malgun Gothic"/>
-                <a:cs typeface="Malgun Gothic"/>
+              <a:rPr sz="4350" b="1">
+                <a:solidFill>
+                  <a:srgbClr val="14243A"/>
+                </a:solidFill>
+                <a:latin typeface="Segoe UI"/>
+                <a:ea typeface="Segoe UI"/>
+                <a:cs typeface="Segoe UI"/>
               </a:rPr>
-              <a:t>Patrol &amp; security</a:t>
-            </a:r>
-          </a:p>
-          <a:p xmlns:a="http://schemas.openxmlformats.org/drawingml/2006/main">
-            <a:pPr algn="l">
-              <a:lnSpc>
-                <a:spcPct val="92000"/>
-              </a:lnSpc>
-              <a:buNone/>
-              <a:defRPr sz="3750" b="1">
-                <a:solidFill>
-                  <a:srgbClr val="061330"/>
-                </a:solidFill>
-                <a:latin typeface="Malgun Gothic"/>
-                <a:ea typeface="Malgun Gothic"/>
-                <a:cs typeface="Malgun Gothic"/>
-              </a:defRPr>
-            </a:pPr>
-            <a:r>
-              <a:rPr sz="3750" b="1">
-                <a:solidFill>
-                  <a:srgbClr val="061330"/>
-                </a:solidFill>
-                <a:latin typeface="Malgun Gothic"/>
-                <a:ea typeface="Malgun Gothic"/>
-                <a:cs typeface="Malgun Gothic"/>
-              </a:rPr>
-              <a:t>robotics in the AI era</a:t>
-            </a:r>
-          </a:p>
-          <a:p xmlns:a="http://schemas.openxmlformats.org/drawingml/2006/main">
-            <a:pPr algn="l">
-              <a:lnSpc>
-                <a:spcPct val="92000"/>
-              </a:lnSpc>
-              <a:buNone/>
-              <a:defRPr sz="3750" b="1">
-                <a:solidFill>
-                  <a:srgbClr val="061330"/>
-                </a:solidFill>
-                <a:latin typeface="Malgun Gothic"/>
-                <a:ea typeface="Malgun Gothic"/>
-                <a:cs typeface="Malgun Gothic"/>
-              </a:defRPr>
-            </a:pPr>
-            <a:r>
-              <a:rPr sz="3750" b="1">
-                <a:solidFill>
-                  <a:srgbClr val="061330"/>
-                </a:solidFill>
-                <a:latin typeface="Malgun Gothic"/>
-                <a:ea typeface="Malgun Gothic"/>
-                <a:cs typeface="Malgun Gothic"/>
-              </a:rPr>
-              <a:t>Aiming for No. 1</a:t>
+              <a:t>QUAN CHENGHAO</a:t>
             </a:r>
           </a:p>
         </p:txBody>
@@ -1419,8 +1453,8 @@
         </p:nvSpPr>
         <p:spPr>
           <a:xfrm xmlns:a="http://schemas.openxmlformats.org/drawingml/2006/main">
-            <a:off x="685800" y="2895600"/>
-            <a:ext cx="7239000" cy="323850"/>
+            <a:off x="609600" y="2181225"/>
+            <a:ext cx="8001000" cy="333375"/>
           </a:xfrm>
           <a:prstGeom xmlns:a="http://schemas.openxmlformats.org/drawingml/2006/main" prst="rect">
             <a:avLst/>
@@ -1432,17 +1466,120 @@
           </a:ln>
         </p:spPr>
         <p:txBody>
-          <a:bodyPr xmlns:a="http://schemas.openxmlformats.org/drawingml/2006/main" wrap="square" lIns="0" tIns="0" rIns="0" bIns="0" anchor="t"/>
-          <a:lstStyle xmlns:a="http://schemas.openxmlformats.org/drawingml/2006/main"/>
+          <a:bodyPr xmlns:a="http://schemas.openxmlformats.org/drawingml/2006/main" wrap="square" lIns="0" tIns="0" rIns="0" bIns="0" anchor="t">
+            <a:noAutofit/>
+          </a:bodyPr>
+          <a:lstStyle xmlns:a="http://schemas.openxmlformats.org/drawingml/2006/main">
+            <a:defPPr algn="l">
+              <a:defRPr sz="1575" b="1">
+                <a:solidFill>
+                  <a:srgbClr val="14243A"/>
+                </a:solidFill>
+                <a:latin typeface="Malgun Gothic"/>
+                <a:ea typeface="Malgun Gothic"/>
+                <a:cs typeface="Malgun Gothic"/>
+              </a:defRPr>
+            </a:defPPr>
+            <a:lvl1pPr algn="l">
+              <a:defRPr sz="1575" b="1">
+                <a:solidFill>
+                  <a:srgbClr val="14243A"/>
+                </a:solidFill>
+                <a:latin typeface="Malgun Gothic"/>
+                <a:ea typeface="Malgun Gothic"/>
+                <a:cs typeface="Malgun Gothic"/>
+              </a:defRPr>
+            </a:lvl1pPr>
+            <a:lvl2pPr algn="l">
+              <a:defRPr sz="1575" b="1">
+                <a:solidFill>
+                  <a:srgbClr val="14243A"/>
+                </a:solidFill>
+                <a:latin typeface="Malgun Gothic"/>
+                <a:ea typeface="Malgun Gothic"/>
+                <a:cs typeface="Malgun Gothic"/>
+              </a:defRPr>
+            </a:lvl2pPr>
+            <a:lvl3pPr algn="l">
+              <a:defRPr sz="1575" b="1">
+                <a:solidFill>
+                  <a:srgbClr val="14243A"/>
+                </a:solidFill>
+                <a:latin typeface="Malgun Gothic"/>
+                <a:ea typeface="Malgun Gothic"/>
+                <a:cs typeface="Malgun Gothic"/>
+              </a:defRPr>
+            </a:lvl3pPr>
+            <a:lvl4pPr algn="l">
+              <a:defRPr sz="1575" b="1">
+                <a:solidFill>
+                  <a:srgbClr val="14243A"/>
+                </a:solidFill>
+                <a:latin typeface="Malgun Gothic"/>
+                <a:ea typeface="Malgun Gothic"/>
+                <a:cs typeface="Malgun Gothic"/>
+              </a:defRPr>
+            </a:lvl4pPr>
+            <a:lvl5pPr algn="l">
+              <a:defRPr sz="1575" b="1">
+                <a:solidFill>
+                  <a:srgbClr val="14243A"/>
+                </a:solidFill>
+                <a:latin typeface="Malgun Gothic"/>
+                <a:ea typeface="Malgun Gothic"/>
+                <a:cs typeface="Malgun Gothic"/>
+              </a:defRPr>
+            </a:lvl5pPr>
+            <a:lvl6pPr algn="l">
+              <a:defRPr sz="1575" b="1">
+                <a:solidFill>
+                  <a:srgbClr val="14243A"/>
+                </a:solidFill>
+                <a:latin typeface="Malgun Gothic"/>
+                <a:ea typeface="Malgun Gothic"/>
+                <a:cs typeface="Malgun Gothic"/>
+              </a:defRPr>
+            </a:lvl6pPr>
+            <a:lvl7pPr algn="l">
+              <a:defRPr sz="1575" b="1">
+                <a:solidFill>
+                  <a:srgbClr val="14243A"/>
+                </a:solidFill>
+                <a:latin typeface="Malgun Gothic"/>
+                <a:ea typeface="Malgun Gothic"/>
+                <a:cs typeface="Malgun Gothic"/>
+              </a:defRPr>
+            </a:lvl7pPr>
+            <a:lvl8pPr algn="l">
+              <a:defRPr sz="1575" b="1">
+                <a:solidFill>
+                  <a:srgbClr val="14243A"/>
+                </a:solidFill>
+                <a:latin typeface="Malgun Gothic"/>
+                <a:ea typeface="Malgun Gothic"/>
+                <a:cs typeface="Malgun Gothic"/>
+              </a:defRPr>
+            </a:lvl8pPr>
+            <a:lvl9pPr algn="l">
+              <a:defRPr sz="1575" b="1">
+                <a:solidFill>
+                  <a:srgbClr val="14243A"/>
+                </a:solidFill>
+                <a:latin typeface="Malgun Gothic"/>
+                <a:ea typeface="Malgun Gothic"/>
+                <a:cs typeface="Malgun Gothic"/>
+              </a:defRPr>
+            </a:lvl9pPr>
+          </a:lstStyle>
           <a:p xmlns:a="http://schemas.openxmlformats.org/drawingml/2006/main">
             <a:pPr algn="l">
               <a:lnSpc>
                 <a:spcPct val="112000"/>
               </a:lnSpc>
               <a:buNone/>
-              <a:defRPr sz="1650" b="1">
-                <a:solidFill>
-                  <a:srgbClr val="0C2A78"/>
+              <a:defRPr sz="1575" b="1">
+                <a:solidFill>
+                  <a:srgbClr val="14243A"/>
                 </a:solidFill>
                 <a:latin typeface="Malgun Gothic"/>
                 <a:ea typeface="Malgun Gothic"/>
@@ -1450,9 +1587,9 @@
               </a:defRPr>
             </a:pPr>
             <a:r>
-              <a:rPr sz="1650" b="1">
-                <a:solidFill>
-                  <a:srgbClr val="0C2A78"/>
+              <a:rPr sz="1575" b="1">
+                <a:solidFill>
+                  <a:srgbClr val="14243A"/>
                 </a:solidFill>
                 <a:latin typeface="Malgun Gothic"/>
                 <a:ea typeface="Malgun Gothic"/>
@@ -1479,8 +1616,8 @@
         </p:nvSpPr>
         <p:spPr>
           <a:xfrm xmlns:a="http://schemas.openxmlformats.org/drawingml/2006/main">
-            <a:off x="685800" y="3390900"/>
-            <a:ext cx="6477000" cy="514350"/>
+            <a:off x="609600" y="2647950"/>
+            <a:ext cx="7715250" cy="628650"/>
           </a:xfrm>
           <a:prstGeom xmlns:a="http://schemas.openxmlformats.org/drawingml/2006/main" prst="rect">
             <a:avLst/>
@@ -1495,16 +1632,117 @@
           <a:bodyPr xmlns:a="http://schemas.openxmlformats.org/drawingml/2006/main" wrap="square" lIns="0" tIns="0" rIns="0" bIns="0" anchor="t">
             <a:noAutofit/>
           </a:bodyPr>
-          <a:lstStyle xmlns:a="http://schemas.openxmlformats.org/drawingml/2006/main"/>
+          <a:lstStyle xmlns:a="http://schemas.openxmlformats.org/drawingml/2006/main">
+            <a:defPPr algn="l">
+              <a:defRPr sz="1500" b="0">
+                <a:solidFill>
+                  <a:srgbClr val="14243A"/>
+                </a:solidFill>
+                <a:latin typeface="Malgun Gothic"/>
+                <a:ea typeface="Malgun Gothic"/>
+                <a:cs typeface="Malgun Gothic"/>
+              </a:defRPr>
+            </a:defPPr>
+            <a:lvl1pPr algn="l">
+              <a:defRPr sz="1500" b="0">
+                <a:solidFill>
+                  <a:srgbClr val="14243A"/>
+                </a:solidFill>
+                <a:latin typeface="Malgun Gothic"/>
+                <a:ea typeface="Malgun Gothic"/>
+                <a:cs typeface="Malgun Gothic"/>
+              </a:defRPr>
+            </a:lvl1pPr>
+            <a:lvl2pPr algn="l">
+              <a:defRPr sz="1500" b="0">
+                <a:solidFill>
+                  <a:srgbClr val="14243A"/>
+                </a:solidFill>
+                <a:latin typeface="Malgun Gothic"/>
+                <a:ea typeface="Malgun Gothic"/>
+                <a:cs typeface="Malgun Gothic"/>
+              </a:defRPr>
+            </a:lvl2pPr>
+            <a:lvl3pPr algn="l">
+              <a:defRPr sz="1500" b="0">
+                <a:solidFill>
+                  <a:srgbClr val="14243A"/>
+                </a:solidFill>
+                <a:latin typeface="Malgun Gothic"/>
+                <a:ea typeface="Malgun Gothic"/>
+                <a:cs typeface="Malgun Gothic"/>
+              </a:defRPr>
+            </a:lvl3pPr>
+            <a:lvl4pPr algn="l">
+              <a:defRPr sz="1500" b="0">
+                <a:solidFill>
+                  <a:srgbClr val="14243A"/>
+                </a:solidFill>
+                <a:latin typeface="Malgun Gothic"/>
+                <a:ea typeface="Malgun Gothic"/>
+                <a:cs typeface="Malgun Gothic"/>
+              </a:defRPr>
+            </a:lvl4pPr>
+            <a:lvl5pPr algn="l">
+              <a:defRPr sz="1500" b="0">
+                <a:solidFill>
+                  <a:srgbClr val="14243A"/>
+                </a:solidFill>
+                <a:latin typeface="Malgun Gothic"/>
+                <a:ea typeface="Malgun Gothic"/>
+                <a:cs typeface="Malgun Gothic"/>
+              </a:defRPr>
+            </a:lvl5pPr>
+            <a:lvl6pPr algn="l">
+              <a:defRPr sz="1500" b="0">
+                <a:solidFill>
+                  <a:srgbClr val="14243A"/>
+                </a:solidFill>
+                <a:latin typeface="Malgun Gothic"/>
+                <a:ea typeface="Malgun Gothic"/>
+                <a:cs typeface="Malgun Gothic"/>
+              </a:defRPr>
+            </a:lvl6pPr>
+            <a:lvl7pPr algn="l">
+              <a:defRPr sz="1500" b="0">
+                <a:solidFill>
+                  <a:srgbClr val="14243A"/>
+                </a:solidFill>
+                <a:latin typeface="Malgun Gothic"/>
+                <a:ea typeface="Malgun Gothic"/>
+                <a:cs typeface="Malgun Gothic"/>
+              </a:defRPr>
+            </a:lvl7pPr>
+            <a:lvl8pPr algn="l">
+              <a:defRPr sz="1500" b="0">
+                <a:solidFill>
+                  <a:srgbClr val="14243A"/>
+                </a:solidFill>
+                <a:latin typeface="Malgun Gothic"/>
+                <a:ea typeface="Malgun Gothic"/>
+                <a:cs typeface="Malgun Gothic"/>
+              </a:defRPr>
+            </a:lvl8pPr>
+            <a:lvl9pPr algn="l">
+              <a:defRPr sz="1500" b="0">
+                <a:solidFill>
+                  <a:srgbClr val="14243A"/>
+                </a:solidFill>
+                <a:latin typeface="Malgun Gothic"/>
+                <a:ea typeface="Malgun Gothic"/>
+                <a:cs typeface="Malgun Gothic"/>
+              </a:defRPr>
+            </a:lvl9pPr>
+          </a:lstStyle>
           <a:p xmlns:a="http://schemas.openxmlformats.org/drawingml/2006/main">
             <a:pPr algn="l">
               <a:lnSpc>
                 <a:spcPct val="118000"/>
               </a:lnSpc>
               <a:buNone/>
-              <a:defRPr sz="1425" b="0">
-                <a:solidFill>
-                  <a:srgbClr val="314260"/>
+              <a:defRPr sz="1500" b="0">
+                <a:solidFill>
+                  <a:srgbClr val="14243A"/>
                 </a:solidFill>
                 <a:latin typeface="Malgun Gothic"/>
                 <a:ea typeface="Malgun Gothic"/>
@@ -1512,9 +1750,9 @@
               </a:defRPr>
             </a:pPr>
             <a:r>
-              <a:rPr sz="1425" b="0">
-                <a:solidFill>
-                  <a:srgbClr val="314260"/>
+              <a:rPr sz="1500" b="0">
+                <a:solidFill>
+                  <a:srgbClr val="14243A"/>
                 </a:solidFill>
                 <a:latin typeface="Malgun Gothic"/>
                 <a:ea typeface="Malgun Gothic"/>
@@ -1529,9 +1767,9 @@
                 <a:spcPct val="118000"/>
               </a:lnSpc>
               <a:buNone/>
-              <a:defRPr sz="1425" b="0">
-                <a:solidFill>
-                  <a:srgbClr val="314260"/>
+              <a:defRPr sz="1500" b="0">
+                <a:solidFill>
+                  <a:srgbClr val="14243A"/>
                 </a:solidFill>
                 <a:latin typeface="Malgun Gothic"/>
                 <a:ea typeface="Malgun Gothic"/>
@@ -1539,9 +1777,9 @@
               </a:defRPr>
             </a:pPr>
             <a:r>
-              <a:rPr sz="1425" b="0">
-                <a:solidFill>
-                  <a:srgbClr val="314260"/>
+              <a:rPr sz="1500" b="0">
+                <a:solidFill>
+                  <a:srgbClr val="14243A"/>
                 </a:solidFill>
                 <a:latin typeface="Malgun Gothic"/>
                 <a:ea typeface="Malgun Gothic"/>
@@ -1568,16 +1806,16 @@
         </p:nvSpPr>
         <p:spPr>
           <a:xfrm xmlns:a="http://schemas.openxmlformats.org/drawingml/2006/main">
-            <a:off x="685800" y="4057650"/>
-            <a:ext cx="6191250" cy="0"/>
+            <a:off x="609600" y="3400425"/>
+            <a:ext cx="7715250" cy="0"/>
           </a:xfrm>
           <a:prstGeom xmlns:a="http://schemas.openxmlformats.org/drawingml/2006/main" prst="line">
             <a:avLst/>
           </a:prstGeom>
           <a:noFill xmlns:a="http://schemas.openxmlformats.org/drawingml/2006/main"/>
-          <a:ln xmlns:a="http://schemas.openxmlformats.org/drawingml/2006/main" w="13335">
+          <a:ln xmlns:a="http://schemas.openxmlformats.org/drawingml/2006/main" w="14288">
             <a:solidFill>
-              <a:srgbClr val="B8C7E6"/>
+              <a:srgbClr val="BBC6D6"/>
             </a:solidFill>
             <a:prstDash val="solid"/>
           </a:ln>
@@ -1599,8 +1837,8 @@
         </p:nvSpPr>
         <p:spPr>
           <a:xfrm xmlns:a="http://schemas.openxmlformats.org/drawingml/2006/main">
-            <a:off x="685800" y="4248150"/>
-            <a:ext cx="914400" cy="285750"/>
+            <a:off x="609600" y="3638550"/>
+            <a:ext cx="904875" cy="314325"/>
           </a:xfrm>
           <a:prstGeom xmlns:a="http://schemas.openxmlformats.org/drawingml/2006/main" prst="rect">
             <a:avLst/>
@@ -1612,17 +1850,120 @@
           </a:ln>
         </p:spPr>
         <p:txBody>
-          <a:bodyPr xmlns:a="http://schemas.openxmlformats.org/drawingml/2006/main" wrap="square" lIns="0" tIns="0" rIns="0" bIns="0" anchor="t"/>
-          <a:lstStyle xmlns:a="http://schemas.openxmlformats.org/drawingml/2006/main"/>
+          <a:bodyPr xmlns:a="http://schemas.openxmlformats.org/drawingml/2006/main" wrap="square" lIns="0" tIns="0" rIns="0" bIns="0" anchor="t">
+            <a:noAutofit/>
+          </a:bodyPr>
+          <a:lstStyle xmlns:a="http://schemas.openxmlformats.org/drawingml/2006/main">
+            <a:defPPr algn="l">
+              <a:defRPr sz="1425" b="1">
+                <a:solidFill>
+                  <a:srgbClr val="2456D8"/>
+                </a:solidFill>
+                <a:latin typeface="Malgun Gothic"/>
+                <a:ea typeface="Malgun Gothic"/>
+                <a:cs typeface="Malgun Gothic"/>
+              </a:defRPr>
+            </a:defPPr>
+            <a:lvl1pPr algn="l">
+              <a:defRPr sz="1425" b="1">
+                <a:solidFill>
+                  <a:srgbClr val="2456D8"/>
+                </a:solidFill>
+                <a:latin typeface="Malgun Gothic"/>
+                <a:ea typeface="Malgun Gothic"/>
+                <a:cs typeface="Malgun Gothic"/>
+              </a:defRPr>
+            </a:lvl1pPr>
+            <a:lvl2pPr algn="l">
+              <a:defRPr sz="1425" b="1">
+                <a:solidFill>
+                  <a:srgbClr val="2456D8"/>
+                </a:solidFill>
+                <a:latin typeface="Malgun Gothic"/>
+                <a:ea typeface="Malgun Gothic"/>
+                <a:cs typeface="Malgun Gothic"/>
+              </a:defRPr>
+            </a:lvl2pPr>
+            <a:lvl3pPr algn="l">
+              <a:defRPr sz="1425" b="1">
+                <a:solidFill>
+                  <a:srgbClr val="2456D8"/>
+                </a:solidFill>
+                <a:latin typeface="Malgun Gothic"/>
+                <a:ea typeface="Malgun Gothic"/>
+                <a:cs typeface="Malgun Gothic"/>
+              </a:defRPr>
+            </a:lvl3pPr>
+            <a:lvl4pPr algn="l">
+              <a:defRPr sz="1425" b="1">
+                <a:solidFill>
+                  <a:srgbClr val="2456D8"/>
+                </a:solidFill>
+                <a:latin typeface="Malgun Gothic"/>
+                <a:ea typeface="Malgun Gothic"/>
+                <a:cs typeface="Malgun Gothic"/>
+              </a:defRPr>
+            </a:lvl4pPr>
+            <a:lvl5pPr algn="l">
+              <a:defRPr sz="1425" b="1">
+                <a:solidFill>
+                  <a:srgbClr val="2456D8"/>
+                </a:solidFill>
+                <a:latin typeface="Malgun Gothic"/>
+                <a:ea typeface="Malgun Gothic"/>
+                <a:cs typeface="Malgun Gothic"/>
+              </a:defRPr>
+            </a:lvl5pPr>
+            <a:lvl6pPr algn="l">
+              <a:defRPr sz="1425" b="1">
+                <a:solidFill>
+                  <a:srgbClr val="2456D8"/>
+                </a:solidFill>
+                <a:latin typeface="Malgun Gothic"/>
+                <a:ea typeface="Malgun Gothic"/>
+                <a:cs typeface="Malgun Gothic"/>
+              </a:defRPr>
+            </a:lvl6pPr>
+            <a:lvl7pPr algn="l">
+              <a:defRPr sz="1425" b="1">
+                <a:solidFill>
+                  <a:srgbClr val="2456D8"/>
+                </a:solidFill>
+                <a:latin typeface="Malgun Gothic"/>
+                <a:ea typeface="Malgun Gothic"/>
+                <a:cs typeface="Malgun Gothic"/>
+              </a:defRPr>
+            </a:lvl7pPr>
+            <a:lvl8pPr algn="l">
+              <a:defRPr sz="1425" b="1">
+                <a:solidFill>
+                  <a:srgbClr val="2456D8"/>
+                </a:solidFill>
+                <a:latin typeface="Malgun Gothic"/>
+                <a:ea typeface="Malgun Gothic"/>
+                <a:cs typeface="Malgun Gothic"/>
+              </a:defRPr>
+            </a:lvl8pPr>
+            <a:lvl9pPr algn="l">
+              <a:defRPr sz="1425" b="1">
+                <a:solidFill>
+                  <a:srgbClr val="2456D8"/>
+                </a:solidFill>
+                <a:latin typeface="Malgun Gothic"/>
+                <a:ea typeface="Malgun Gothic"/>
+                <a:cs typeface="Malgun Gothic"/>
+              </a:defRPr>
+            </a:lvl9pPr>
+          </a:lstStyle>
           <a:p xmlns:a="http://schemas.openxmlformats.org/drawingml/2006/main">
             <a:pPr algn="l">
               <a:lnSpc>
                 <a:spcPct val="112000"/>
               </a:lnSpc>
               <a:buNone/>
-              <a:defRPr sz="1275" b="1">
-                <a:solidFill>
-                  <a:srgbClr val="1238C8"/>
+              <a:defRPr sz="1425" b="1">
+                <a:solidFill>
+                  <a:srgbClr val="2456D8"/>
                 </a:solidFill>
                 <a:latin typeface="Malgun Gothic"/>
                 <a:ea typeface="Malgun Gothic"/>
@@ -1630,9 +1971,9 @@
               </a:defRPr>
             </a:pPr>
             <a:r>
-              <a:rPr sz="1275" b="1">
-                <a:solidFill>
-                  <a:srgbClr val="1238C8"/>
+              <a:rPr sz="1425" b="1">
+                <a:solidFill>
+                  <a:srgbClr val="2456D8"/>
                 </a:solidFill>
                 <a:latin typeface="Malgun Gothic"/>
                 <a:ea typeface="Malgun Gothic"/>
@@ -1659,8 +2000,8 @@
         </p:nvSpPr>
         <p:spPr>
           <a:xfrm xmlns:a="http://schemas.openxmlformats.org/drawingml/2006/main">
-            <a:off x="1695450" y="4238625"/>
-            <a:ext cx="5810250" cy="400050"/>
+            <a:off x="1628775" y="3629025"/>
+            <a:ext cx="6753225" cy="400050"/>
           </a:xfrm>
           <a:prstGeom xmlns:a="http://schemas.openxmlformats.org/drawingml/2006/main" prst="rect">
             <a:avLst/>
@@ -1672,17 +2013,120 @@
           </a:ln>
         </p:spPr>
         <p:txBody>
-          <a:bodyPr xmlns:a="http://schemas.openxmlformats.org/drawingml/2006/main" wrap="square" lIns="0" tIns="0" rIns="0" bIns="0" anchor="t"/>
-          <a:lstStyle xmlns:a="http://schemas.openxmlformats.org/drawingml/2006/main"/>
+          <a:bodyPr xmlns:a="http://schemas.openxmlformats.org/drawingml/2006/main" wrap="square" lIns="0" tIns="0" rIns="0" bIns="0" anchor="t">
+            <a:noAutofit/>
+          </a:bodyPr>
+          <a:lstStyle xmlns:a="http://schemas.openxmlformats.org/drawingml/2006/main">
+            <a:defPPr algn="l">
+              <a:defRPr sz="1500" b="0">
+                <a:solidFill>
+                  <a:srgbClr val="14243A"/>
+                </a:solidFill>
+                <a:latin typeface="Malgun Gothic"/>
+                <a:ea typeface="Malgun Gothic"/>
+                <a:cs typeface="Malgun Gothic"/>
+              </a:defRPr>
+            </a:defPPr>
+            <a:lvl1pPr algn="l">
+              <a:defRPr sz="1500" b="0">
+                <a:solidFill>
+                  <a:srgbClr val="14243A"/>
+                </a:solidFill>
+                <a:latin typeface="Malgun Gothic"/>
+                <a:ea typeface="Malgun Gothic"/>
+                <a:cs typeface="Malgun Gothic"/>
+              </a:defRPr>
+            </a:lvl1pPr>
+            <a:lvl2pPr algn="l">
+              <a:defRPr sz="1500" b="0">
+                <a:solidFill>
+                  <a:srgbClr val="14243A"/>
+                </a:solidFill>
+                <a:latin typeface="Malgun Gothic"/>
+                <a:ea typeface="Malgun Gothic"/>
+                <a:cs typeface="Malgun Gothic"/>
+              </a:defRPr>
+            </a:lvl2pPr>
+            <a:lvl3pPr algn="l">
+              <a:defRPr sz="1500" b="0">
+                <a:solidFill>
+                  <a:srgbClr val="14243A"/>
+                </a:solidFill>
+                <a:latin typeface="Malgun Gothic"/>
+                <a:ea typeface="Malgun Gothic"/>
+                <a:cs typeface="Malgun Gothic"/>
+              </a:defRPr>
+            </a:lvl3pPr>
+            <a:lvl4pPr algn="l">
+              <a:defRPr sz="1500" b="0">
+                <a:solidFill>
+                  <a:srgbClr val="14243A"/>
+                </a:solidFill>
+                <a:latin typeface="Malgun Gothic"/>
+                <a:ea typeface="Malgun Gothic"/>
+                <a:cs typeface="Malgun Gothic"/>
+              </a:defRPr>
+            </a:lvl4pPr>
+            <a:lvl5pPr algn="l">
+              <a:defRPr sz="1500" b="0">
+                <a:solidFill>
+                  <a:srgbClr val="14243A"/>
+                </a:solidFill>
+                <a:latin typeface="Malgun Gothic"/>
+                <a:ea typeface="Malgun Gothic"/>
+                <a:cs typeface="Malgun Gothic"/>
+              </a:defRPr>
+            </a:lvl5pPr>
+            <a:lvl6pPr algn="l">
+              <a:defRPr sz="1500" b="0">
+                <a:solidFill>
+                  <a:srgbClr val="14243A"/>
+                </a:solidFill>
+                <a:latin typeface="Malgun Gothic"/>
+                <a:ea typeface="Malgun Gothic"/>
+                <a:cs typeface="Malgun Gothic"/>
+              </a:defRPr>
+            </a:lvl6pPr>
+            <a:lvl7pPr algn="l">
+              <a:defRPr sz="1500" b="0">
+                <a:solidFill>
+                  <a:srgbClr val="14243A"/>
+                </a:solidFill>
+                <a:latin typeface="Malgun Gothic"/>
+                <a:ea typeface="Malgun Gothic"/>
+                <a:cs typeface="Malgun Gothic"/>
+              </a:defRPr>
+            </a:lvl7pPr>
+            <a:lvl8pPr algn="l">
+              <a:defRPr sz="1500" b="0">
+                <a:solidFill>
+                  <a:srgbClr val="14243A"/>
+                </a:solidFill>
+                <a:latin typeface="Malgun Gothic"/>
+                <a:ea typeface="Malgun Gothic"/>
+                <a:cs typeface="Malgun Gothic"/>
+              </a:defRPr>
+            </a:lvl8pPr>
+            <a:lvl9pPr algn="l">
+              <a:defRPr sz="1500" b="0">
+                <a:solidFill>
+                  <a:srgbClr val="14243A"/>
+                </a:solidFill>
+                <a:latin typeface="Malgun Gothic"/>
+                <a:ea typeface="Malgun Gothic"/>
+                <a:cs typeface="Malgun Gothic"/>
+              </a:defRPr>
+            </a:lvl9pPr>
+          </a:lstStyle>
           <a:p xmlns:a="http://schemas.openxmlformats.org/drawingml/2006/main">
             <a:pPr algn="l">
               <a:lnSpc>
                 <a:spcPct val="116000"/>
               </a:lnSpc>
               <a:buNone/>
-              <a:defRPr sz="1425" b="0">
-                <a:solidFill>
-                  <a:srgbClr val="1B2B4D"/>
+              <a:defRPr sz="1500" b="0">
+                <a:solidFill>
+                  <a:srgbClr val="14243A"/>
                 </a:solidFill>
                 <a:latin typeface="Malgun Gothic"/>
                 <a:ea typeface="Malgun Gothic"/>
@@ -1690,9 +2134,9 @@
               </a:defRPr>
             </a:pPr>
             <a:r>
-              <a:rPr sz="1425" b="0">
-                <a:solidFill>
-                  <a:srgbClr val="1B2B4D"/>
+              <a:rPr sz="1500" b="0">
+                <a:solidFill>
+                  <a:srgbClr val="14243A"/>
                 </a:solidFill>
                 <a:latin typeface="Malgun Gothic"/>
                 <a:ea typeface="Malgun Gothic"/>
@@ -1719,8 +2163,8 @@
         </p:nvSpPr>
         <p:spPr>
           <a:xfrm xmlns:a="http://schemas.openxmlformats.org/drawingml/2006/main">
-            <a:off x="685800" y="4648200"/>
-            <a:ext cx="914400" cy="285750"/>
+            <a:off x="609600" y="4086225"/>
+            <a:ext cx="904875" cy="314325"/>
           </a:xfrm>
           <a:prstGeom xmlns:a="http://schemas.openxmlformats.org/drawingml/2006/main" prst="rect">
             <a:avLst/>
@@ -1732,17 +2176,120 @@
           </a:ln>
         </p:spPr>
         <p:txBody>
-          <a:bodyPr xmlns:a="http://schemas.openxmlformats.org/drawingml/2006/main" wrap="square" lIns="0" tIns="0" rIns="0" bIns="0" anchor="t"/>
-          <a:lstStyle xmlns:a="http://schemas.openxmlformats.org/drawingml/2006/main"/>
+          <a:bodyPr xmlns:a="http://schemas.openxmlformats.org/drawingml/2006/main" wrap="square" lIns="0" tIns="0" rIns="0" bIns="0" anchor="t">
+            <a:noAutofit/>
+          </a:bodyPr>
+          <a:lstStyle xmlns:a="http://schemas.openxmlformats.org/drawingml/2006/main">
+            <a:defPPr algn="l">
+              <a:defRPr sz="1425" b="1">
+                <a:solidFill>
+                  <a:srgbClr val="2456D8"/>
+                </a:solidFill>
+                <a:latin typeface="Malgun Gothic"/>
+                <a:ea typeface="Malgun Gothic"/>
+                <a:cs typeface="Malgun Gothic"/>
+              </a:defRPr>
+            </a:defPPr>
+            <a:lvl1pPr algn="l">
+              <a:defRPr sz="1425" b="1">
+                <a:solidFill>
+                  <a:srgbClr val="2456D8"/>
+                </a:solidFill>
+                <a:latin typeface="Malgun Gothic"/>
+                <a:ea typeface="Malgun Gothic"/>
+                <a:cs typeface="Malgun Gothic"/>
+              </a:defRPr>
+            </a:lvl1pPr>
+            <a:lvl2pPr algn="l">
+              <a:defRPr sz="1425" b="1">
+                <a:solidFill>
+                  <a:srgbClr val="2456D8"/>
+                </a:solidFill>
+                <a:latin typeface="Malgun Gothic"/>
+                <a:ea typeface="Malgun Gothic"/>
+                <a:cs typeface="Malgun Gothic"/>
+              </a:defRPr>
+            </a:lvl2pPr>
+            <a:lvl3pPr algn="l">
+              <a:defRPr sz="1425" b="1">
+                <a:solidFill>
+                  <a:srgbClr val="2456D8"/>
+                </a:solidFill>
+                <a:latin typeface="Malgun Gothic"/>
+                <a:ea typeface="Malgun Gothic"/>
+                <a:cs typeface="Malgun Gothic"/>
+              </a:defRPr>
+            </a:lvl3pPr>
+            <a:lvl4pPr algn="l">
+              <a:defRPr sz="1425" b="1">
+                <a:solidFill>
+                  <a:srgbClr val="2456D8"/>
+                </a:solidFill>
+                <a:latin typeface="Malgun Gothic"/>
+                <a:ea typeface="Malgun Gothic"/>
+                <a:cs typeface="Malgun Gothic"/>
+              </a:defRPr>
+            </a:lvl4pPr>
+            <a:lvl5pPr algn="l">
+              <a:defRPr sz="1425" b="1">
+                <a:solidFill>
+                  <a:srgbClr val="2456D8"/>
+                </a:solidFill>
+                <a:latin typeface="Malgun Gothic"/>
+                <a:ea typeface="Malgun Gothic"/>
+                <a:cs typeface="Malgun Gothic"/>
+              </a:defRPr>
+            </a:lvl5pPr>
+            <a:lvl6pPr algn="l">
+              <a:defRPr sz="1425" b="1">
+                <a:solidFill>
+                  <a:srgbClr val="2456D8"/>
+                </a:solidFill>
+                <a:latin typeface="Malgun Gothic"/>
+                <a:ea typeface="Malgun Gothic"/>
+                <a:cs typeface="Malgun Gothic"/>
+              </a:defRPr>
+            </a:lvl6pPr>
+            <a:lvl7pPr algn="l">
+              <a:defRPr sz="1425" b="1">
+                <a:solidFill>
+                  <a:srgbClr val="2456D8"/>
+                </a:solidFill>
+                <a:latin typeface="Malgun Gothic"/>
+                <a:ea typeface="Malgun Gothic"/>
+                <a:cs typeface="Malgun Gothic"/>
+              </a:defRPr>
+            </a:lvl7pPr>
+            <a:lvl8pPr algn="l">
+              <a:defRPr sz="1425" b="1">
+                <a:solidFill>
+                  <a:srgbClr val="2456D8"/>
+                </a:solidFill>
+                <a:latin typeface="Malgun Gothic"/>
+                <a:ea typeface="Malgun Gothic"/>
+                <a:cs typeface="Malgun Gothic"/>
+              </a:defRPr>
+            </a:lvl8pPr>
+            <a:lvl9pPr algn="l">
+              <a:defRPr sz="1425" b="1">
+                <a:solidFill>
+                  <a:srgbClr val="2456D8"/>
+                </a:solidFill>
+                <a:latin typeface="Malgun Gothic"/>
+                <a:ea typeface="Malgun Gothic"/>
+                <a:cs typeface="Malgun Gothic"/>
+              </a:defRPr>
+            </a:lvl9pPr>
+          </a:lstStyle>
           <a:p xmlns:a="http://schemas.openxmlformats.org/drawingml/2006/main">
             <a:pPr algn="l">
               <a:lnSpc>
                 <a:spcPct val="112000"/>
               </a:lnSpc>
               <a:buNone/>
-              <a:defRPr sz="1275" b="1">
-                <a:solidFill>
-                  <a:srgbClr val="1238C8"/>
+              <a:defRPr sz="1425" b="1">
+                <a:solidFill>
+                  <a:srgbClr val="2456D8"/>
                 </a:solidFill>
                 <a:latin typeface="Malgun Gothic"/>
                 <a:ea typeface="Malgun Gothic"/>
@@ -1750,9 +2297,9 @@
               </a:defRPr>
             </a:pPr>
             <a:r>
-              <a:rPr sz="1275" b="1">
-                <a:solidFill>
-                  <a:srgbClr val="1238C8"/>
+              <a:rPr sz="1425" b="1">
+                <a:solidFill>
+                  <a:srgbClr val="2456D8"/>
                 </a:solidFill>
                 <a:latin typeface="Malgun Gothic"/>
                 <a:ea typeface="Malgun Gothic"/>
@@ -1779,8 +2326,8 @@
         </p:nvSpPr>
         <p:spPr>
           <a:xfrm xmlns:a="http://schemas.openxmlformats.org/drawingml/2006/main">
-            <a:off x="1695450" y="4638675"/>
-            <a:ext cx="5810250" cy="400050"/>
+            <a:off x="1628775" y="4076700"/>
+            <a:ext cx="6753225" cy="400050"/>
           </a:xfrm>
           <a:prstGeom xmlns:a="http://schemas.openxmlformats.org/drawingml/2006/main" prst="rect">
             <a:avLst/>
@@ -1792,17 +2339,120 @@
           </a:ln>
         </p:spPr>
         <p:txBody>
-          <a:bodyPr xmlns:a="http://schemas.openxmlformats.org/drawingml/2006/main" wrap="square" lIns="0" tIns="0" rIns="0" bIns="0" anchor="t"/>
-          <a:lstStyle xmlns:a="http://schemas.openxmlformats.org/drawingml/2006/main"/>
+          <a:bodyPr xmlns:a="http://schemas.openxmlformats.org/drawingml/2006/main" wrap="square" lIns="0" tIns="0" rIns="0" bIns="0" anchor="t">
+            <a:noAutofit/>
+          </a:bodyPr>
+          <a:lstStyle xmlns:a="http://schemas.openxmlformats.org/drawingml/2006/main">
+            <a:defPPr algn="l">
+              <a:defRPr sz="1500" b="0">
+                <a:solidFill>
+                  <a:srgbClr val="14243A"/>
+                </a:solidFill>
+                <a:latin typeface="Malgun Gothic"/>
+                <a:ea typeface="Malgun Gothic"/>
+                <a:cs typeface="Malgun Gothic"/>
+              </a:defRPr>
+            </a:defPPr>
+            <a:lvl1pPr algn="l">
+              <a:defRPr sz="1500" b="0">
+                <a:solidFill>
+                  <a:srgbClr val="14243A"/>
+                </a:solidFill>
+                <a:latin typeface="Malgun Gothic"/>
+                <a:ea typeface="Malgun Gothic"/>
+                <a:cs typeface="Malgun Gothic"/>
+              </a:defRPr>
+            </a:lvl1pPr>
+            <a:lvl2pPr algn="l">
+              <a:defRPr sz="1500" b="0">
+                <a:solidFill>
+                  <a:srgbClr val="14243A"/>
+                </a:solidFill>
+                <a:latin typeface="Malgun Gothic"/>
+                <a:ea typeface="Malgun Gothic"/>
+                <a:cs typeface="Malgun Gothic"/>
+              </a:defRPr>
+            </a:lvl2pPr>
+            <a:lvl3pPr algn="l">
+              <a:defRPr sz="1500" b="0">
+                <a:solidFill>
+                  <a:srgbClr val="14243A"/>
+                </a:solidFill>
+                <a:latin typeface="Malgun Gothic"/>
+                <a:ea typeface="Malgun Gothic"/>
+                <a:cs typeface="Malgun Gothic"/>
+              </a:defRPr>
+            </a:lvl3pPr>
+            <a:lvl4pPr algn="l">
+              <a:defRPr sz="1500" b="0">
+                <a:solidFill>
+                  <a:srgbClr val="14243A"/>
+                </a:solidFill>
+                <a:latin typeface="Malgun Gothic"/>
+                <a:ea typeface="Malgun Gothic"/>
+                <a:cs typeface="Malgun Gothic"/>
+              </a:defRPr>
+            </a:lvl4pPr>
+            <a:lvl5pPr algn="l">
+              <a:defRPr sz="1500" b="0">
+                <a:solidFill>
+                  <a:srgbClr val="14243A"/>
+                </a:solidFill>
+                <a:latin typeface="Malgun Gothic"/>
+                <a:ea typeface="Malgun Gothic"/>
+                <a:cs typeface="Malgun Gothic"/>
+              </a:defRPr>
+            </a:lvl5pPr>
+            <a:lvl6pPr algn="l">
+              <a:defRPr sz="1500" b="0">
+                <a:solidFill>
+                  <a:srgbClr val="14243A"/>
+                </a:solidFill>
+                <a:latin typeface="Malgun Gothic"/>
+                <a:ea typeface="Malgun Gothic"/>
+                <a:cs typeface="Malgun Gothic"/>
+              </a:defRPr>
+            </a:lvl6pPr>
+            <a:lvl7pPr algn="l">
+              <a:defRPr sz="1500" b="0">
+                <a:solidFill>
+                  <a:srgbClr val="14243A"/>
+                </a:solidFill>
+                <a:latin typeface="Malgun Gothic"/>
+                <a:ea typeface="Malgun Gothic"/>
+                <a:cs typeface="Malgun Gothic"/>
+              </a:defRPr>
+            </a:lvl7pPr>
+            <a:lvl8pPr algn="l">
+              <a:defRPr sz="1500" b="0">
+                <a:solidFill>
+                  <a:srgbClr val="14243A"/>
+                </a:solidFill>
+                <a:latin typeface="Malgun Gothic"/>
+                <a:ea typeface="Malgun Gothic"/>
+                <a:cs typeface="Malgun Gothic"/>
+              </a:defRPr>
+            </a:lvl8pPr>
+            <a:lvl9pPr algn="l">
+              <a:defRPr sz="1500" b="0">
+                <a:solidFill>
+                  <a:srgbClr val="14243A"/>
+                </a:solidFill>
+                <a:latin typeface="Malgun Gothic"/>
+                <a:ea typeface="Malgun Gothic"/>
+                <a:cs typeface="Malgun Gothic"/>
+              </a:defRPr>
+            </a:lvl9pPr>
+          </a:lstStyle>
           <a:p xmlns:a="http://schemas.openxmlformats.org/drawingml/2006/main">
             <a:pPr algn="l">
               <a:lnSpc>
                 <a:spcPct val="116000"/>
               </a:lnSpc>
               <a:buNone/>
-              <a:defRPr sz="1425" b="0">
-                <a:solidFill>
-                  <a:srgbClr val="1B2B4D"/>
+              <a:defRPr sz="1500" b="0">
+                <a:solidFill>
+                  <a:srgbClr val="14243A"/>
                 </a:solidFill>
                 <a:latin typeface="Malgun Gothic"/>
                 <a:ea typeface="Malgun Gothic"/>
@@ -1810,9 +2460,9 @@
               </a:defRPr>
             </a:pPr>
             <a:r>
-              <a:rPr sz="1425" b="0">
-                <a:solidFill>
-                  <a:srgbClr val="1B2B4D"/>
+              <a:rPr sz="1500" b="0">
+                <a:solidFill>
+                  <a:srgbClr val="14243A"/>
                 </a:solidFill>
                 <a:latin typeface="Malgun Gothic"/>
                 <a:ea typeface="Malgun Gothic"/>
@@ -1839,8 +2489,8 @@
         </p:nvSpPr>
         <p:spPr>
           <a:xfrm xmlns:a="http://schemas.openxmlformats.org/drawingml/2006/main">
-            <a:off x="685800" y="5048250"/>
-            <a:ext cx="914400" cy="285750"/>
+            <a:off x="609600" y="4533900"/>
+            <a:ext cx="904875" cy="314325"/>
           </a:xfrm>
           <a:prstGeom xmlns:a="http://schemas.openxmlformats.org/drawingml/2006/main" prst="rect">
             <a:avLst/>
@@ -1852,17 +2502,120 @@
           </a:ln>
         </p:spPr>
         <p:txBody>
-          <a:bodyPr xmlns:a="http://schemas.openxmlformats.org/drawingml/2006/main" wrap="square" lIns="0" tIns="0" rIns="0" bIns="0" anchor="t"/>
-          <a:lstStyle xmlns:a="http://schemas.openxmlformats.org/drawingml/2006/main"/>
+          <a:bodyPr xmlns:a="http://schemas.openxmlformats.org/drawingml/2006/main" wrap="square" lIns="0" tIns="0" rIns="0" bIns="0" anchor="t">
+            <a:noAutofit/>
+          </a:bodyPr>
+          <a:lstStyle xmlns:a="http://schemas.openxmlformats.org/drawingml/2006/main">
+            <a:defPPr algn="l">
+              <a:defRPr sz="1425" b="1">
+                <a:solidFill>
+                  <a:srgbClr val="2456D8"/>
+                </a:solidFill>
+                <a:latin typeface="Malgun Gothic"/>
+                <a:ea typeface="Malgun Gothic"/>
+                <a:cs typeface="Malgun Gothic"/>
+              </a:defRPr>
+            </a:defPPr>
+            <a:lvl1pPr algn="l">
+              <a:defRPr sz="1425" b="1">
+                <a:solidFill>
+                  <a:srgbClr val="2456D8"/>
+                </a:solidFill>
+                <a:latin typeface="Malgun Gothic"/>
+                <a:ea typeface="Malgun Gothic"/>
+                <a:cs typeface="Malgun Gothic"/>
+              </a:defRPr>
+            </a:lvl1pPr>
+            <a:lvl2pPr algn="l">
+              <a:defRPr sz="1425" b="1">
+                <a:solidFill>
+                  <a:srgbClr val="2456D8"/>
+                </a:solidFill>
+                <a:latin typeface="Malgun Gothic"/>
+                <a:ea typeface="Malgun Gothic"/>
+                <a:cs typeface="Malgun Gothic"/>
+              </a:defRPr>
+            </a:lvl2pPr>
+            <a:lvl3pPr algn="l">
+              <a:defRPr sz="1425" b="1">
+                <a:solidFill>
+                  <a:srgbClr val="2456D8"/>
+                </a:solidFill>
+                <a:latin typeface="Malgun Gothic"/>
+                <a:ea typeface="Malgun Gothic"/>
+                <a:cs typeface="Malgun Gothic"/>
+              </a:defRPr>
+            </a:lvl3pPr>
+            <a:lvl4pPr algn="l">
+              <a:defRPr sz="1425" b="1">
+                <a:solidFill>
+                  <a:srgbClr val="2456D8"/>
+                </a:solidFill>
+                <a:latin typeface="Malgun Gothic"/>
+                <a:ea typeface="Malgun Gothic"/>
+                <a:cs typeface="Malgun Gothic"/>
+              </a:defRPr>
+            </a:lvl4pPr>
+            <a:lvl5pPr algn="l">
+              <a:defRPr sz="1425" b="1">
+                <a:solidFill>
+                  <a:srgbClr val="2456D8"/>
+                </a:solidFill>
+                <a:latin typeface="Malgun Gothic"/>
+                <a:ea typeface="Malgun Gothic"/>
+                <a:cs typeface="Malgun Gothic"/>
+              </a:defRPr>
+            </a:lvl5pPr>
+            <a:lvl6pPr algn="l">
+              <a:defRPr sz="1425" b="1">
+                <a:solidFill>
+                  <a:srgbClr val="2456D8"/>
+                </a:solidFill>
+                <a:latin typeface="Malgun Gothic"/>
+                <a:ea typeface="Malgun Gothic"/>
+                <a:cs typeface="Malgun Gothic"/>
+              </a:defRPr>
+            </a:lvl6pPr>
+            <a:lvl7pPr algn="l">
+              <a:defRPr sz="1425" b="1">
+                <a:solidFill>
+                  <a:srgbClr val="2456D8"/>
+                </a:solidFill>
+                <a:latin typeface="Malgun Gothic"/>
+                <a:ea typeface="Malgun Gothic"/>
+                <a:cs typeface="Malgun Gothic"/>
+              </a:defRPr>
+            </a:lvl7pPr>
+            <a:lvl8pPr algn="l">
+              <a:defRPr sz="1425" b="1">
+                <a:solidFill>
+                  <a:srgbClr val="2456D8"/>
+                </a:solidFill>
+                <a:latin typeface="Malgun Gothic"/>
+                <a:ea typeface="Malgun Gothic"/>
+                <a:cs typeface="Malgun Gothic"/>
+              </a:defRPr>
+            </a:lvl8pPr>
+            <a:lvl9pPr algn="l">
+              <a:defRPr sz="1425" b="1">
+                <a:solidFill>
+                  <a:srgbClr val="2456D8"/>
+                </a:solidFill>
+                <a:latin typeface="Malgun Gothic"/>
+                <a:ea typeface="Malgun Gothic"/>
+                <a:cs typeface="Malgun Gothic"/>
+              </a:defRPr>
+            </a:lvl9pPr>
+          </a:lstStyle>
           <a:p xmlns:a="http://schemas.openxmlformats.org/drawingml/2006/main">
             <a:pPr algn="l">
               <a:lnSpc>
                 <a:spcPct val="112000"/>
               </a:lnSpc>
               <a:buNone/>
-              <a:defRPr sz="1275" b="1">
-                <a:solidFill>
-                  <a:srgbClr val="1238C8"/>
+              <a:defRPr sz="1425" b="1">
+                <a:solidFill>
+                  <a:srgbClr val="2456D8"/>
                 </a:solidFill>
                 <a:latin typeface="Malgun Gothic"/>
                 <a:ea typeface="Malgun Gothic"/>
@@ -1870,9 +2623,9 @@
               </a:defRPr>
             </a:pPr>
             <a:r>
-              <a:rPr sz="1275" b="1">
-                <a:solidFill>
-                  <a:srgbClr val="1238C8"/>
+              <a:rPr sz="1425" b="1">
+                <a:solidFill>
+                  <a:srgbClr val="2456D8"/>
                 </a:solidFill>
                 <a:latin typeface="Malgun Gothic"/>
                 <a:ea typeface="Malgun Gothic"/>
@@ -1899,8 +2652,8 @@
         </p:nvSpPr>
         <p:spPr>
           <a:xfrm xmlns:a="http://schemas.openxmlformats.org/drawingml/2006/main">
-            <a:off x="1695450" y="5038725"/>
-            <a:ext cx="5810250" cy="400050"/>
+            <a:off x="1628775" y="4524375"/>
+            <a:ext cx="6753225" cy="400050"/>
           </a:xfrm>
           <a:prstGeom xmlns:a="http://schemas.openxmlformats.org/drawingml/2006/main" prst="rect">
             <a:avLst/>
@@ -1912,17 +2665,120 @@
           </a:ln>
         </p:spPr>
         <p:txBody>
-          <a:bodyPr xmlns:a="http://schemas.openxmlformats.org/drawingml/2006/main" wrap="square" lIns="0" tIns="0" rIns="0" bIns="0" anchor="t"/>
-          <a:lstStyle xmlns:a="http://schemas.openxmlformats.org/drawingml/2006/main"/>
+          <a:bodyPr xmlns:a="http://schemas.openxmlformats.org/drawingml/2006/main" wrap="square" lIns="0" tIns="0" rIns="0" bIns="0" anchor="t">
+            <a:noAutofit/>
+          </a:bodyPr>
+          <a:lstStyle xmlns:a="http://schemas.openxmlformats.org/drawingml/2006/main">
+            <a:defPPr algn="l">
+              <a:defRPr sz="1500" b="0">
+                <a:solidFill>
+                  <a:srgbClr val="14243A"/>
+                </a:solidFill>
+                <a:latin typeface="Malgun Gothic"/>
+                <a:ea typeface="Malgun Gothic"/>
+                <a:cs typeface="Malgun Gothic"/>
+              </a:defRPr>
+            </a:defPPr>
+            <a:lvl1pPr algn="l">
+              <a:defRPr sz="1500" b="0">
+                <a:solidFill>
+                  <a:srgbClr val="14243A"/>
+                </a:solidFill>
+                <a:latin typeface="Malgun Gothic"/>
+                <a:ea typeface="Malgun Gothic"/>
+                <a:cs typeface="Malgun Gothic"/>
+              </a:defRPr>
+            </a:lvl1pPr>
+            <a:lvl2pPr algn="l">
+              <a:defRPr sz="1500" b="0">
+                <a:solidFill>
+                  <a:srgbClr val="14243A"/>
+                </a:solidFill>
+                <a:latin typeface="Malgun Gothic"/>
+                <a:ea typeface="Malgun Gothic"/>
+                <a:cs typeface="Malgun Gothic"/>
+              </a:defRPr>
+            </a:lvl2pPr>
+            <a:lvl3pPr algn="l">
+              <a:defRPr sz="1500" b="0">
+                <a:solidFill>
+                  <a:srgbClr val="14243A"/>
+                </a:solidFill>
+                <a:latin typeface="Malgun Gothic"/>
+                <a:ea typeface="Malgun Gothic"/>
+                <a:cs typeface="Malgun Gothic"/>
+              </a:defRPr>
+            </a:lvl3pPr>
+            <a:lvl4pPr algn="l">
+              <a:defRPr sz="1500" b="0">
+                <a:solidFill>
+                  <a:srgbClr val="14243A"/>
+                </a:solidFill>
+                <a:latin typeface="Malgun Gothic"/>
+                <a:ea typeface="Malgun Gothic"/>
+                <a:cs typeface="Malgun Gothic"/>
+              </a:defRPr>
+            </a:lvl4pPr>
+            <a:lvl5pPr algn="l">
+              <a:defRPr sz="1500" b="0">
+                <a:solidFill>
+                  <a:srgbClr val="14243A"/>
+                </a:solidFill>
+                <a:latin typeface="Malgun Gothic"/>
+                <a:ea typeface="Malgun Gothic"/>
+                <a:cs typeface="Malgun Gothic"/>
+              </a:defRPr>
+            </a:lvl5pPr>
+            <a:lvl6pPr algn="l">
+              <a:defRPr sz="1500" b="0">
+                <a:solidFill>
+                  <a:srgbClr val="14243A"/>
+                </a:solidFill>
+                <a:latin typeface="Malgun Gothic"/>
+                <a:ea typeface="Malgun Gothic"/>
+                <a:cs typeface="Malgun Gothic"/>
+              </a:defRPr>
+            </a:lvl6pPr>
+            <a:lvl7pPr algn="l">
+              <a:defRPr sz="1500" b="0">
+                <a:solidFill>
+                  <a:srgbClr val="14243A"/>
+                </a:solidFill>
+                <a:latin typeface="Malgun Gothic"/>
+                <a:ea typeface="Malgun Gothic"/>
+                <a:cs typeface="Malgun Gothic"/>
+              </a:defRPr>
+            </a:lvl7pPr>
+            <a:lvl8pPr algn="l">
+              <a:defRPr sz="1500" b="0">
+                <a:solidFill>
+                  <a:srgbClr val="14243A"/>
+                </a:solidFill>
+                <a:latin typeface="Malgun Gothic"/>
+                <a:ea typeface="Malgun Gothic"/>
+                <a:cs typeface="Malgun Gothic"/>
+              </a:defRPr>
+            </a:lvl8pPr>
+            <a:lvl9pPr algn="l">
+              <a:defRPr sz="1500" b="0">
+                <a:solidFill>
+                  <a:srgbClr val="14243A"/>
+                </a:solidFill>
+                <a:latin typeface="Malgun Gothic"/>
+                <a:ea typeface="Malgun Gothic"/>
+                <a:cs typeface="Malgun Gothic"/>
+              </a:defRPr>
+            </a:lvl9pPr>
+          </a:lstStyle>
           <a:p xmlns:a="http://schemas.openxmlformats.org/drawingml/2006/main">
             <a:pPr algn="l">
               <a:lnSpc>
                 <a:spcPct val="116000"/>
               </a:lnSpc>
               <a:buNone/>
-              <a:defRPr sz="1425" b="0">
-                <a:solidFill>
-                  <a:srgbClr val="1B2B4D"/>
+              <a:defRPr sz="1500" b="0">
+                <a:solidFill>
+                  <a:srgbClr val="14243A"/>
                 </a:solidFill>
                 <a:latin typeface="Malgun Gothic"/>
                 <a:ea typeface="Malgun Gothic"/>
@@ -1930,9 +2786,9 @@
               </a:defRPr>
             </a:pPr>
             <a:r>
-              <a:rPr sz="1425" b="0">
-                <a:solidFill>
-                  <a:srgbClr val="1B2B4D"/>
+              <a:rPr sz="1500" b="0">
+                <a:solidFill>
+                  <a:srgbClr val="14243A"/>
                 </a:solidFill>
                 <a:latin typeface="Malgun Gothic"/>
                 <a:ea typeface="Malgun Gothic"/>
@@ -1959,8 +2815,8 @@
         </p:nvSpPr>
         <p:spPr>
           <a:xfrm xmlns:a="http://schemas.openxmlformats.org/drawingml/2006/main">
-            <a:off x="685800" y="5448300"/>
-            <a:ext cx="914400" cy="285750"/>
+            <a:off x="609600" y="4981575"/>
+            <a:ext cx="904875" cy="314325"/>
           </a:xfrm>
           <a:prstGeom xmlns:a="http://schemas.openxmlformats.org/drawingml/2006/main" prst="rect">
             <a:avLst/>
@@ -1972,17 +2828,120 @@
           </a:ln>
         </p:spPr>
         <p:txBody>
-          <a:bodyPr xmlns:a="http://schemas.openxmlformats.org/drawingml/2006/main" wrap="square" lIns="0" tIns="0" rIns="0" bIns="0" anchor="t"/>
-          <a:lstStyle xmlns:a="http://schemas.openxmlformats.org/drawingml/2006/main"/>
+          <a:bodyPr xmlns:a="http://schemas.openxmlformats.org/drawingml/2006/main" wrap="square" lIns="0" tIns="0" rIns="0" bIns="0" anchor="t">
+            <a:noAutofit/>
+          </a:bodyPr>
+          <a:lstStyle xmlns:a="http://schemas.openxmlformats.org/drawingml/2006/main">
+            <a:defPPr algn="l">
+              <a:defRPr sz="1425" b="1">
+                <a:solidFill>
+                  <a:srgbClr val="2456D8"/>
+                </a:solidFill>
+                <a:latin typeface="Malgun Gothic"/>
+                <a:ea typeface="Malgun Gothic"/>
+                <a:cs typeface="Malgun Gothic"/>
+              </a:defRPr>
+            </a:defPPr>
+            <a:lvl1pPr algn="l">
+              <a:defRPr sz="1425" b="1">
+                <a:solidFill>
+                  <a:srgbClr val="2456D8"/>
+                </a:solidFill>
+                <a:latin typeface="Malgun Gothic"/>
+                <a:ea typeface="Malgun Gothic"/>
+                <a:cs typeface="Malgun Gothic"/>
+              </a:defRPr>
+            </a:lvl1pPr>
+            <a:lvl2pPr algn="l">
+              <a:defRPr sz="1425" b="1">
+                <a:solidFill>
+                  <a:srgbClr val="2456D8"/>
+                </a:solidFill>
+                <a:latin typeface="Malgun Gothic"/>
+                <a:ea typeface="Malgun Gothic"/>
+                <a:cs typeface="Malgun Gothic"/>
+              </a:defRPr>
+            </a:lvl2pPr>
+            <a:lvl3pPr algn="l">
+              <a:defRPr sz="1425" b="1">
+                <a:solidFill>
+                  <a:srgbClr val="2456D8"/>
+                </a:solidFill>
+                <a:latin typeface="Malgun Gothic"/>
+                <a:ea typeface="Malgun Gothic"/>
+                <a:cs typeface="Malgun Gothic"/>
+              </a:defRPr>
+            </a:lvl3pPr>
+            <a:lvl4pPr algn="l">
+              <a:defRPr sz="1425" b="1">
+                <a:solidFill>
+                  <a:srgbClr val="2456D8"/>
+                </a:solidFill>
+                <a:latin typeface="Malgun Gothic"/>
+                <a:ea typeface="Malgun Gothic"/>
+                <a:cs typeface="Malgun Gothic"/>
+              </a:defRPr>
+            </a:lvl4pPr>
+            <a:lvl5pPr algn="l">
+              <a:defRPr sz="1425" b="1">
+                <a:solidFill>
+                  <a:srgbClr val="2456D8"/>
+                </a:solidFill>
+                <a:latin typeface="Malgun Gothic"/>
+                <a:ea typeface="Malgun Gothic"/>
+                <a:cs typeface="Malgun Gothic"/>
+              </a:defRPr>
+            </a:lvl5pPr>
+            <a:lvl6pPr algn="l">
+              <a:defRPr sz="1425" b="1">
+                <a:solidFill>
+                  <a:srgbClr val="2456D8"/>
+                </a:solidFill>
+                <a:latin typeface="Malgun Gothic"/>
+                <a:ea typeface="Malgun Gothic"/>
+                <a:cs typeface="Malgun Gothic"/>
+              </a:defRPr>
+            </a:lvl6pPr>
+            <a:lvl7pPr algn="l">
+              <a:defRPr sz="1425" b="1">
+                <a:solidFill>
+                  <a:srgbClr val="2456D8"/>
+                </a:solidFill>
+                <a:latin typeface="Malgun Gothic"/>
+                <a:ea typeface="Malgun Gothic"/>
+                <a:cs typeface="Malgun Gothic"/>
+              </a:defRPr>
+            </a:lvl7pPr>
+            <a:lvl8pPr algn="l">
+              <a:defRPr sz="1425" b="1">
+                <a:solidFill>
+                  <a:srgbClr val="2456D8"/>
+                </a:solidFill>
+                <a:latin typeface="Malgun Gothic"/>
+                <a:ea typeface="Malgun Gothic"/>
+                <a:cs typeface="Malgun Gothic"/>
+              </a:defRPr>
+            </a:lvl8pPr>
+            <a:lvl9pPr algn="l">
+              <a:defRPr sz="1425" b="1">
+                <a:solidFill>
+                  <a:srgbClr val="2456D8"/>
+                </a:solidFill>
+                <a:latin typeface="Malgun Gothic"/>
+                <a:ea typeface="Malgun Gothic"/>
+                <a:cs typeface="Malgun Gothic"/>
+              </a:defRPr>
+            </a:lvl9pPr>
+          </a:lstStyle>
           <a:p xmlns:a="http://schemas.openxmlformats.org/drawingml/2006/main">
             <a:pPr algn="l">
               <a:lnSpc>
                 <a:spcPct val="112000"/>
               </a:lnSpc>
               <a:buNone/>
-              <a:defRPr sz="1275" b="1">
-                <a:solidFill>
-                  <a:srgbClr val="1238C8"/>
+              <a:defRPr sz="1425" b="1">
+                <a:solidFill>
+                  <a:srgbClr val="2456D8"/>
                 </a:solidFill>
                 <a:latin typeface="Malgun Gothic"/>
                 <a:ea typeface="Malgun Gothic"/>
@@ -1990,9 +2949,9 @@
               </a:defRPr>
             </a:pPr>
             <a:r>
-              <a:rPr sz="1275" b="1">
-                <a:solidFill>
-                  <a:srgbClr val="1238C8"/>
+              <a:rPr sz="1425" b="1">
+                <a:solidFill>
+                  <a:srgbClr val="2456D8"/>
                 </a:solidFill>
                 <a:latin typeface="Malgun Gothic"/>
                 <a:ea typeface="Malgun Gothic"/>
@@ -2019,8 +2978,8 @@
         </p:nvSpPr>
         <p:spPr>
           <a:xfrm xmlns:a="http://schemas.openxmlformats.org/drawingml/2006/main">
-            <a:off x="1695450" y="5438775"/>
-            <a:ext cx="5810250" cy="400050"/>
+            <a:off x="1628775" y="4972050"/>
+            <a:ext cx="6753225" cy="400050"/>
           </a:xfrm>
           <a:prstGeom xmlns:a="http://schemas.openxmlformats.org/drawingml/2006/main" prst="rect">
             <a:avLst/>
@@ -2032,17 +2991,120 @@
           </a:ln>
         </p:spPr>
         <p:txBody>
-          <a:bodyPr xmlns:a="http://schemas.openxmlformats.org/drawingml/2006/main" wrap="square" lIns="0" tIns="0" rIns="0" bIns="0" anchor="t"/>
-          <a:lstStyle xmlns:a="http://schemas.openxmlformats.org/drawingml/2006/main"/>
+          <a:bodyPr xmlns:a="http://schemas.openxmlformats.org/drawingml/2006/main" wrap="square" lIns="0" tIns="0" rIns="0" bIns="0" anchor="t">
+            <a:noAutofit/>
+          </a:bodyPr>
+          <a:lstStyle xmlns:a="http://schemas.openxmlformats.org/drawingml/2006/main">
+            <a:defPPr algn="l">
+              <a:defRPr sz="1500" b="0">
+                <a:solidFill>
+                  <a:srgbClr val="14243A"/>
+                </a:solidFill>
+                <a:latin typeface="Malgun Gothic"/>
+                <a:ea typeface="Malgun Gothic"/>
+                <a:cs typeface="Malgun Gothic"/>
+              </a:defRPr>
+            </a:defPPr>
+            <a:lvl1pPr algn="l">
+              <a:defRPr sz="1500" b="0">
+                <a:solidFill>
+                  <a:srgbClr val="14243A"/>
+                </a:solidFill>
+                <a:latin typeface="Malgun Gothic"/>
+                <a:ea typeface="Malgun Gothic"/>
+                <a:cs typeface="Malgun Gothic"/>
+              </a:defRPr>
+            </a:lvl1pPr>
+            <a:lvl2pPr algn="l">
+              <a:defRPr sz="1500" b="0">
+                <a:solidFill>
+                  <a:srgbClr val="14243A"/>
+                </a:solidFill>
+                <a:latin typeface="Malgun Gothic"/>
+                <a:ea typeface="Malgun Gothic"/>
+                <a:cs typeface="Malgun Gothic"/>
+              </a:defRPr>
+            </a:lvl2pPr>
+            <a:lvl3pPr algn="l">
+              <a:defRPr sz="1500" b="0">
+                <a:solidFill>
+                  <a:srgbClr val="14243A"/>
+                </a:solidFill>
+                <a:latin typeface="Malgun Gothic"/>
+                <a:ea typeface="Malgun Gothic"/>
+                <a:cs typeface="Malgun Gothic"/>
+              </a:defRPr>
+            </a:lvl3pPr>
+            <a:lvl4pPr algn="l">
+              <a:defRPr sz="1500" b="0">
+                <a:solidFill>
+                  <a:srgbClr val="14243A"/>
+                </a:solidFill>
+                <a:latin typeface="Malgun Gothic"/>
+                <a:ea typeface="Malgun Gothic"/>
+                <a:cs typeface="Malgun Gothic"/>
+              </a:defRPr>
+            </a:lvl4pPr>
+            <a:lvl5pPr algn="l">
+              <a:defRPr sz="1500" b="0">
+                <a:solidFill>
+                  <a:srgbClr val="14243A"/>
+                </a:solidFill>
+                <a:latin typeface="Malgun Gothic"/>
+                <a:ea typeface="Malgun Gothic"/>
+                <a:cs typeface="Malgun Gothic"/>
+              </a:defRPr>
+            </a:lvl5pPr>
+            <a:lvl6pPr algn="l">
+              <a:defRPr sz="1500" b="0">
+                <a:solidFill>
+                  <a:srgbClr val="14243A"/>
+                </a:solidFill>
+                <a:latin typeface="Malgun Gothic"/>
+                <a:ea typeface="Malgun Gothic"/>
+                <a:cs typeface="Malgun Gothic"/>
+              </a:defRPr>
+            </a:lvl6pPr>
+            <a:lvl7pPr algn="l">
+              <a:defRPr sz="1500" b="0">
+                <a:solidFill>
+                  <a:srgbClr val="14243A"/>
+                </a:solidFill>
+                <a:latin typeface="Malgun Gothic"/>
+                <a:ea typeface="Malgun Gothic"/>
+                <a:cs typeface="Malgun Gothic"/>
+              </a:defRPr>
+            </a:lvl7pPr>
+            <a:lvl8pPr algn="l">
+              <a:defRPr sz="1500" b="0">
+                <a:solidFill>
+                  <a:srgbClr val="14243A"/>
+                </a:solidFill>
+                <a:latin typeface="Malgun Gothic"/>
+                <a:ea typeface="Malgun Gothic"/>
+                <a:cs typeface="Malgun Gothic"/>
+              </a:defRPr>
+            </a:lvl8pPr>
+            <a:lvl9pPr algn="l">
+              <a:defRPr sz="1500" b="0">
+                <a:solidFill>
+                  <a:srgbClr val="14243A"/>
+                </a:solidFill>
+                <a:latin typeface="Malgun Gothic"/>
+                <a:ea typeface="Malgun Gothic"/>
+                <a:cs typeface="Malgun Gothic"/>
+              </a:defRPr>
+            </a:lvl9pPr>
+          </a:lstStyle>
           <a:p xmlns:a="http://schemas.openxmlformats.org/drawingml/2006/main">
             <a:pPr algn="l">
               <a:lnSpc>
                 <a:spcPct val="116000"/>
               </a:lnSpc>
               <a:buNone/>
-              <a:defRPr sz="1425" b="0">
-                <a:solidFill>
-                  <a:srgbClr val="1B2B4D"/>
+              <a:defRPr sz="1500" b="0">
+                <a:solidFill>
+                  <a:srgbClr val="14243A"/>
                 </a:solidFill>
                 <a:latin typeface="Malgun Gothic"/>
                 <a:ea typeface="Malgun Gothic"/>
@@ -2050,9 +3112,9 @@
               </a:defRPr>
             </a:pPr>
             <a:r>
-              <a:rPr sz="1425" b="0">
-                <a:solidFill>
-                  <a:srgbClr val="1B2B4D"/>
+              <a:rPr sz="1500" b="0">
+                <a:solidFill>
+                  <a:srgbClr val="14243A"/>
                 </a:solidFill>
                 <a:latin typeface="Malgun Gothic"/>
                 <a:ea typeface="Malgun Gothic"/>
@@ -2062,41 +3124,6 @@
             </a:r>
           </a:p>
         </p:txBody>
-      </p:sp>
-      <p:sp>
-        <p:nvSpPr>
-          <p:cNvPr id="17" name="goal-callout">
-            <a:extLst xmlns:a="http://schemas.openxmlformats.org/drawingml/2006/main">
-              <a:ext uri="{FF2B5EF4-FFF2-40B4-BE49-F238E27FC236}">
-                <a16:creationId xmlns:a16="http://schemas.microsoft.com/office/drawing/2014/main" id="{4746266F-4879-47C3-BDCA-5126763DCD92}"/>
-              </a:ext>
-            </a:extLst>
-          </p:cNvPr>
-          <p:cNvSpPr>
-            <a:spLocks xmlns:a="http://schemas.openxmlformats.org/drawingml/2006/main" noGrp="1"/>
-          </p:cNvSpPr>
-          <p:nvPr/>
-        </p:nvSpPr>
-        <p:spPr>
-          <a:xfrm xmlns:a="http://schemas.openxmlformats.org/drawingml/2006/main">
-            <a:off x="685800" y="6038850"/>
-            <a:ext cx="5905500" cy="361950"/>
-          </a:xfrm>
-          <a:prstGeom xmlns:a="http://schemas.openxmlformats.org/drawingml/2006/main" prst="roundRect">
-            <a:avLst>
-              <a:gd name="adj" fmla="val 21053"/>
-            </a:avLst>
-          </a:prstGeom>
-          <a:solidFill xmlns:a="http://schemas.openxmlformats.org/drawingml/2006/main">
-            <a:srgbClr val="071957"/>
-          </a:solidFill>
-          <a:ln xmlns:a="http://schemas.openxmlformats.org/drawingml/2006/main" w="0">
-            <a:solidFill>
-              <a:srgbClr val="071957"/>
-            </a:solidFill>
-            <a:prstDash val="solid"/>
-          </a:ln>
-        </p:spPr>
       </p:sp>
       <p:sp>
         <p:nvSpPr>
@@ -2114,8 +3141,8 @@
         </p:nvSpPr>
         <p:spPr>
           <a:xfrm xmlns:a="http://schemas.openxmlformats.org/drawingml/2006/main">
-            <a:off x="876300" y="6134100"/>
-            <a:ext cx="5524500" cy="190500"/>
+            <a:off x="609600" y="5972175"/>
+            <a:ext cx="7905750" cy="476250"/>
           </a:xfrm>
           <a:prstGeom xmlns:a="http://schemas.openxmlformats.org/drawingml/2006/main" prst="rect">
             <a:avLst/>
@@ -2127,17 +3154,120 @@
           </a:ln>
         </p:spPr>
         <p:txBody>
-          <a:bodyPr xmlns:a="http://schemas.openxmlformats.org/drawingml/2006/main" wrap="square" lIns="0" tIns="0" rIns="0" bIns="0" anchor="t"/>
-          <a:lstStyle xmlns:a="http://schemas.openxmlformats.org/drawingml/2006/main"/>
+          <a:bodyPr xmlns:a="http://schemas.openxmlformats.org/drawingml/2006/main" wrap="square" lIns="0" tIns="0" rIns="0" bIns="0" anchor="t">
+            <a:noAutofit/>
+          </a:bodyPr>
+          <a:lstStyle xmlns:a="http://schemas.openxmlformats.org/drawingml/2006/main">
+            <a:defPPr algn="l">
+              <a:defRPr sz="1350" b="0">
+                <a:solidFill>
+                  <a:srgbClr val="14243A"/>
+                </a:solidFill>
+                <a:latin typeface="Malgun Gothic"/>
+                <a:ea typeface="Malgun Gothic"/>
+                <a:cs typeface="Malgun Gothic"/>
+              </a:defRPr>
+            </a:defPPr>
+            <a:lvl1pPr algn="l">
+              <a:defRPr sz="1350" b="0">
+                <a:solidFill>
+                  <a:srgbClr val="14243A"/>
+                </a:solidFill>
+                <a:latin typeface="Malgun Gothic"/>
+                <a:ea typeface="Malgun Gothic"/>
+                <a:cs typeface="Malgun Gothic"/>
+              </a:defRPr>
+            </a:lvl1pPr>
+            <a:lvl2pPr algn="l">
+              <a:defRPr sz="1350" b="0">
+                <a:solidFill>
+                  <a:srgbClr val="14243A"/>
+                </a:solidFill>
+                <a:latin typeface="Malgun Gothic"/>
+                <a:ea typeface="Malgun Gothic"/>
+                <a:cs typeface="Malgun Gothic"/>
+              </a:defRPr>
+            </a:lvl2pPr>
+            <a:lvl3pPr algn="l">
+              <a:defRPr sz="1350" b="0">
+                <a:solidFill>
+                  <a:srgbClr val="14243A"/>
+                </a:solidFill>
+                <a:latin typeface="Malgun Gothic"/>
+                <a:ea typeface="Malgun Gothic"/>
+                <a:cs typeface="Malgun Gothic"/>
+              </a:defRPr>
+            </a:lvl3pPr>
+            <a:lvl4pPr algn="l">
+              <a:defRPr sz="1350" b="0">
+                <a:solidFill>
+                  <a:srgbClr val="14243A"/>
+                </a:solidFill>
+                <a:latin typeface="Malgun Gothic"/>
+                <a:ea typeface="Malgun Gothic"/>
+                <a:cs typeface="Malgun Gothic"/>
+              </a:defRPr>
+            </a:lvl4pPr>
+            <a:lvl5pPr algn="l">
+              <a:defRPr sz="1350" b="0">
+                <a:solidFill>
+                  <a:srgbClr val="14243A"/>
+                </a:solidFill>
+                <a:latin typeface="Malgun Gothic"/>
+                <a:ea typeface="Malgun Gothic"/>
+                <a:cs typeface="Malgun Gothic"/>
+              </a:defRPr>
+            </a:lvl5pPr>
+            <a:lvl6pPr algn="l">
+              <a:defRPr sz="1350" b="0">
+                <a:solidFill>
+                  <a:srgbClr val="14243A"/>
+                </a:solidFill>
+                <a:latin typeface="Malgun Gothic"/>
+                <a:ea typeface="Malgun Gothic"/>
+                <a:cs typeface="Malgun Gothic"/>
+              </a:defRPr>
+            </a:lvl6pPr>
+            <a:lvl7pPr algn="l">
+              <a:defRPr sz="1350" b="0">
+                <a:solidFill>
+                  <a:srgbClr val="14243A"/>
+                </a:solidFill>
+                <a:latin typeface="Malgun Gothic"/>
+                <a:ea typeface="Malgun Gothic"/>
+                <a:cs typeface="Malgun Gothic"/>
+              </a:defRPr>
+            </a:lvl7pPr>
+            <a:lvl8pPr algn="l">
+              <a:defRPr sz="1350" b="0">
+                <a:solidFill>
+                  <a:srgbClr val="14243A"/>
+                </a:solidFill>
+                <a:latin typeface="Malgun Gothic"/>
+                <a:ea typeface="Malgun Gothic"/>
+                <a:cs typeface="Malgun Gothic"/>
+              </a:defRPr>
+            </a:lvl8pPr>
+            <a:lvl9pPr algn="l">
+              <a:defRPr sz="1350" b="0">
+                <a:solidFill>
+                  <a:srgbClr val="14243A"/>
+                </a:solidFill>
+                <a:latin typeface="Malgun Gothic"/>
+                <a:ea typeface="Malgun Gothic"/>
+                <a:cs typeface="Malgun Gothic"/>
+              </a:defRPr>
+            </a:lvl9pPr>
+          </a:lstStyle>
           <a:p xmlns:a="http://schemas.openxmlformats.org/drawingml/2006/main">
             <a:pPr algn="l">
               <a:lnSpc>
                 <a:spcPct val="112000"/>
               </a:lnSpc>
               <a:buNone/>
-              <a:defRPr sz="1200" b="1">
-                <a:solidFill>
-                  <a:srgbClr val="FFFFFF"/>
+              <a:defRPr sz="1350" b="0">
+                <a:solidFill>
+                  <a:srgbClr val="14243A"/>
                 </a:solidFill>
                 <a:latin typeface="Malgun Gothic"/>
                 <a:ea typeface="Malgun Gothic"/>
@@ -2145,9 +3275,9 @@
               </a:defRPr>
             </a:pPr>
             <a:r>
-              <a:rPr sz="1200" b="1">
-                <a:solidFill>
-                  <a:srgbClr val="FFFFFF"/>
+              <a:rPr sz="1350" b="0">
+                <a:solidFill>
+                  <a:srgbClr val="14243A"/>
                 </a:solidFill>
                 <a:latin typeface="Malgun Gothic"/>
                 <a:ea typeface="Malgun Gothic"/>
@@ -2174,49 +3304,50 @@
         </p:nvSpPr>
         <p:spPr>
           <a:xfrm xmlns:a="http://schemas.openxmlformats.org/drawingml/2006/main">
-            <a:off x="10172700" y="4724400"/>
-            <a:ext cx="1352550" cy="1581150"/>
+            <a:off x="9496425" y="4562475"/>
+            <a:ext cx="1504950" cy="1504950"/>
           </a:xfrm>
-          <a:prstGeom xmlns:a="http://schemas.openxmlformats.org/drawingml/2006/main" prst="roundRect">
+          <a:prstGeom xmlns:a="http://schemas.openxmlformats.org/drawingml/2006/main" prst="rect">
             <a:avLst>
               <a:gd name="adj" fmla="val 5634"/>
             </a:avLst>
           </a:prstGeom>
           <a:solidFill xmlns:a="http://schemas.openxmlformats.org/drawingml/2006/main">
-            <a:srgbClr val="FFFFFF">
-              <a:alpha val="96000"/>
-            </a:srgbClr>
+            <a:srgbClr val="FFFFFF"/>
           </a:solidFill>
-          <a:ln xmlns:a="http://schemas.openxmlformats.org/drawingml/2006/main" w="11430">
-            <a:solidFill>
-              <a:srgbClr val="D8E3F7"/>
-            </a:solidFill>
-            <a:prstDash val="solid"/>
+          <a:ln xmlns:a="http://schemas.openxmlformats.org/drawingml/2006/main" w="0">
+            <a:noFill/>
           </a:ln>
         </p:spPr>
         <p:style>
           <a:lnRef xmlns:a="http://schemas.openxmlformats.org/drawingml/2006/main" idx="0"/>
           <a:fillRef xmlns:a="http://schemas.openxmlformats.org/drawingml/2006/main" idx="0"/>
-          <a:effectRef xmlns:a="http://schemas.openxmlformats.org/drawingml/2006/main" idx="4"/>
+          <a:effectRef xmlns:a="http://schemas.openxmlformats.org/drawingml/2006/main" idx="0"/>
           <a:fontRef xmlns:a="http://schemas.openxmlformats.org/drawingml/2006/main" idx="major"/>
         </p:style>
       </p:sp>
       <p:pic>
         <p:nvPicPr>
-          <p:cNvPr id="44" name=""/>
+          <p:cNvPr id="44" name="">
+            <a:extLst xmlns:a="http://schemas.openxmlformats.org/drawingml/2006/main">
+              <a:ext uri="{FF2B5EF4-FFF2-40B4-BE49-F238E27FC236}">
+                <a16:creationId xmlns:a16="http://schemas.microsoft.com/office/drawing/2014/main" id="{C6B0F997-5DBA-4DF0-8D5C-FF85E52A254C}"/>
+              </a:ext>
+            </a:extLst>
+          </p:cNvPr>
           <p:cNvPicPr>
             <a:picLocks xmlns:a="http://schemas.openxmlformats.org/drawingml/2006/main" noChangeAspect="1"/>
           </p:cNvPicPr>
           <p:nvPr/>
         </p:nvPicPr>
         <p:blipFill>
-          <a:blip xmlns:r="http://schemas.openxmlformats.org/officeDocument/2006/relationships" xmlns:a="http://schemas.openxmlformats.org/drawingml/2006/main" r:embed="Red85ff5f53764c9a"/>
+          <a:blip xmlns:r="http://schemas.openxmlformats.org/officeDocument/2006/relationships" xmlns:a="http://schemas.openxmlformats.org/drawingml/2006/main" r:embed="R6ce3dd04ae4347b2"/>
           <a:stretch xmlns:a="http://schemas.openxmlformats.org/drawingml/2006/main"/>
         </p:blipFill>
         <p:spPr>
           <a:xfrm xmlns:a="http://schemas.openxmlformats.org/drawingml/2006/main">
-            <a:off x="10306050" y="4838700"/>
-            <a:ext cx="1085850" cy="1085850"/>
+            <a:off x="9601200" y="4667250"/>
+            <a:ext cx="1295400" cy="1295400"/>
           </a:xfrm>
           <a:prstGeom xmlns:a="http://schemas.openxmlformats.org/drawingml/2006/main" prst="rect">
             <a:avLst/>
@@ -2239,8 +3370,8 @@
         </p:nvSpPr>
         <p:spPr>
           <a:xfrm xmlns:a="http://schemas.openxmlformats.org/drawingml/2006/main">
-            <a:off x="10267950" y="5991225"/>
-            <a:ext cx="1162050" cy="190500"/>
+            <a:off x="9201150" y="6115050"/>
+            <a:ext cx="2095500" cy="228600"/>
           </a:xfrm>
           <a:prstGeom xmlns:a="http://schemas.openxmlformats.org/drawingml/2006/main" prst="rect">
             <a:avLst/>
@@ -2252,17 +3383,120 @@
           </a:ln>
         </p:spPr>
         <p:txBody>
-          <a:bodyPr xmlns:a="http://schemas.openxmlformats.org/drawingml/2006/main" wrap="square" lIns="0" tIns="0" rIns="0" bIns="0" anchor="t"/>
-          <a:lstStyle xmlns:a="http://schemas.openxmlformats.org/drawingml/2006/main"/>
+          <a:bodyPr xmlns:a="http://schemas.openxmlformats.org/drawingml/2006/main" wrap="square" lIns="0" tIns="0" rIns="0" bIns="0" anchor="t">
+            <a:noAutofit/>
+          </a:bodyPr>
+          <a:lstStyle xmlns:a="http://schemas.openxmlformats.org/drawingml/2006/main">
+            <a:defPPr algn="ctr">
+              <a:defRPr sz="1125" b="1">
+                <a:solidFill>
+                  <a:srgbClr val="14243A"/>
+                </a:solidFill>
+                <a:latin typeface="Malgun Gothic"/>
+                <a:ea typeface="Malgun Gothic"/>
+                <a:cs typeface="Malgun Gothic"/>
+              </a:defRPr>
+            </a:defPPr>
+            <a:lvl1pPr algn="ctr">
+              <a:defRPr sz="1125" b="1">
+                <a:solidFill>
+                  <a:srgbClr val="14243A"/>
+                </a:solidFill>
+                <a:latin typeface="Malgun Gothic"/>
+                <a:ea typeface="Malgun Gothic"/>
+                <a:cs typeface="Malgun Gothic"/>
+              </a:defRPr>
+            </a:lvl1pPr>
+            <a:lvl2pPr algn="ctr">
+              <a:defRPr sz="1125" b="1">
+                <a:solidFill>
+                  <a:srgbClr val="14243A"/>
+                </a:solidFill>
+                <a:latin typeface="Malgun Gothic"/>
+                <a:ea typeface="Malgun Gothic"/>
+                <a:cs typeface="Malgun Gothic"/>
+              </a:defRPr>
+            </a:lvl2pPr>
+            <a:lvl3pPr algn="ctr">
+              <a:defRPr sz="1125" b="1">
+                <a:solidFill>
+                  <a:srgbClr val="14243A"/>
+                </a:solidFill>
+                <a:latin typeface="Malgun Gothic"/>
+                <a:ea typeface="Malgun Gothic"/>
+                <a:cs typeface="Malgun Gothic"/>
+              </a:defRPr>
+            </a:lvl3pPr>
+            <a:lvl4pPr algn="ctr">
+              <a:defRPr sz="1125" b="1">
+                <a:solidFill>
+                  <a:srgbClr val="14243A"/>
+                </a:solidFill>
+                <a:latin typeface="Malgun Gothic"/>
+                <a:ea typeface="Malgun Gothic"/>
+                <a:cs typeface="Malgun Gothic"/>
+              </a:defRPr>
+            </a:lvl4pPr>
+            <a:lvl5pPr algn="ctr">
+              <a:defRPr sz="1125" b="1">
+                <a:solidFill>
+                  <a:srgbClr val="14243A"/>
+                </a:solidFill>
+                <a:latin typeface="Malgun Gothic"/>
+                <a:ea typeface="Malgun Gothic"/>
+                <a:cs typeface="Malgun Gothic"/>
+              </a:defRPr>
+            </a:lvl5pPr>
+            <a:lvl6pPr algn="ctr">
+              <a:defRPr sz="1125" b="1">
+                <a:solidFill>
+                  <a:srgbClr val="14243A"/>
+                </a:solidFill>
+                <a:latin typeface="Malgun Gothic"/>
+                <a:ea typeface="Malgun Gothic"/>
+                <a:cs typeface="Malgun Gothic"/>
+              </a:defRPr>
+            </a:lvl6pPr>
+            <a:lvl7pPr algn="ctr">
+              <a:defRPr sz="1125" b="1">
+                <a:solidFill>
+                  <a:srgbClr val="14243A"/>
+                </a:solidFill>
+                <a:latin typeface="Malgun Gothic"/>
+                <a:ea typeface="Malgun Gothic"/>
+                <a:cs typeface="Malgun Gothic"/>
+              </a:defRPr>
+            </a:lvl7pPr>
+            <a:lvl8pPr algn="ctr">
+              <a:defRPr sz="1125" b="1">
+                <a:solidFill>
+                  <a:srgbClr val="14243A"/>
+                </a:solidFill>
+                <a:latin typeface="Malgun Gothic"/>
+                <a:ea typeface="Malgun Gothic"/>
+                <a:cs typeface="Malgun Gothic"/>
+              </a:defRPr>
+            </a:lvl8pPr>
+            <a:lvl9pPr algn="ctr">
+              <a:defRPr sz="1125" b="1">
+                <a:solidFill>
+                  <a:srgbClr val="14243A"/>
+                </a:solidFill>
+                <a:latin typeface="Malgun Gothic"/>
+                <a:ea typeface="Malgun Gothic"/>
+                <a:cs typeface="Malgun Gothic"/>
+              </a:defRPr>
+            </a:lvl9pPr>
+          </a:lstStyle>
           <a:p xmlns:a="http://schemas.openxmlformats.org/drawingml/2006/main">
             <a:pPr algn="ctr">
               <a:lnSpc>
                 <a:spcPct val="112000"/>
               </a:lnSpc>
               <a:buNone/>
-              <a:defRPr sz="975" b="1">
-                <a:solidFill>
-                  <a:srgbClr val="081A4F"/>
+              <a:defRPr sz="1125" b="1">
+                <a:solidFill>
+                  <a:srgbClr val="14243A"/>
                 </a:solidFill>
                 <a:latin typeface="Malgun Gothic"/>
                 <a:ea typeface="Malgun Gothic"/>
@@ -2270,9 +3504,9 @@
               </a:defRPr>
             </a:pPr>
             <a:r>
-              <a:rPr sz="975" b="1">
-                <a:solidFill>
-                  <a:srgbClr val="081A4F"/>
+              <a:rPr sz="1125" b="1">
+                <a:solidFill>
+                  <a:srgbClr val="14243A"/>
                 </a:solidFill>
                 <a:latin typeface="Malgun Gothic"/>
                 <a:ea typeface="Malgun Gothic"/>
@@ -2299,8 +3533,8 @@
         </p:nvSpPr>
         <p:spPr>
           <a:xfrm xmlns:a="http://schemas.openxmlformats.org/drawingml/2006/main">
-            <a:off x="10182225" y="6172200"/>
-            <a:ext cx="1333500" cy="152400"/>
+            <a:off x="9086850" y="6381750"/>
+            <a:ext cx="2324100" cy="180975"/>
           </a:xfrm>
           <a:prstGeom xmlns:a="http://schemas.openxmlformats.org/drawingml/2006/main" prst="rect">
             <a:avLst/>
@@ -2312,33 +3546,796 @@
           </a:ln>
         </p:spPr>
         <p:txBody>
-          <a:bodyPr xmlns:a="http://schemas.openxmlformats.org/drawingml/2006/main" wrap="square" lIns="0" tIns="0" rIns="0" bIns="0" anchor="t"/>
-          <a:lstStyle xmlns:a="http://schemas.openxmlformats.org/drawingml/2006/main"/>
+          <a:bodyPr xmlns:a="http://schemas.openxmlformats.org/drawingml/2006/main" wrap="square" lIns="0" tIns="0" rIns="0" bIns="0" anchor="t">
+            <a:noAutofit/>
+          </a:bodyPr>
+          <a:lstStyle xmlns:a="http://schemas.openxmlformats.org/drawingml/2006/main">
+            <a:defPPr algn="ctr">
+              <a:defRPr sz="900" b="0">
+                <a:solidFill>
+                  <a:srgbClr val="14243A"/>
+                </a:solidFill>
+                <a:latin typeface="Segoe UI"/>
+                <a:ea typeface="Segoe UI"/>
+                <a:cs typeface="Segoe UI"/>
+              </a:defRPr>
+            </a:defPPr>
+            <a:lvl1pPr algn="ctr">
+              <a:defRPr sz="900" b="0">
+                <a:solidFill>
+                  <a:srgbClr val="14243A"/>
+                </a:solidFill>
+                <a:latin typeface="Segoe UI"/>
+                <a:ea typeface="Segoe UI"/>
+                <a:cs typeface="Segoe UI"/>
+              </a:defRPr>
+            </a:lvl1pPr>
+            <a:lvl2pPr algn="ctr">
+              <a:defRPr sz="900" b="0">
+                <a:solidFill>
+                  <a:srgbClr val="14243A"/>
+                </a:solidFill>
+                <a:latin typeface="Segoe UI"/>
+                <a:ea typeface="Segoe UI"/>
+                <a:cs typeface="Segoe UI"/>
+              </a:defRPr>
+            </a:lvl2pPr>
+            <a:lvl3pPr algn="ctr">
+              <a:defRPr sz="900" b="0">
+                <a:solidFill>
+                  <a:srgbClr val="14243A"/>
+                </a:solidFill>
+                <a:latin typeface="Segoe UI"/>
+                <a:ea typeface="Segoe UI"/>
+                <a:cs typeface="Segoe UI"/>
+              </a:defRPr>
+            </a:lvl3pPr>
+            <a:lvl4pPr algn="ctr">
+              <a:defRPr sz="900" b="0">
+                <a:solidFill>
+                  <a:srgbClr val="14243A"/>
+                </a:solidFill>
+                <a:latin typeface="Segoe UI"/>
+                <a:ea typeface="Segoe UI"/>
+                <a:cs typeface="Segoe UI"/>
+              </a:defRPr>
+            </a:lvl4pPr>
+            <a:lvl5pPr algn="ctr">
+              <a:defRPr sz="900" b="0">
+                <a:solidFill>
+                  <a:srgbClr val="14243A"/>
+                </a:solidFill>
+                <a:latin typeface="Segoe UI"/>
+                <a:ea typeface="Segoe UI"/>
+                <a:cs typeface="Segoe UI"/>
+              </a:defRPr>
+            </a:lvl5pPr>
+            <a:lvl6pPr algn="ctr">
+              <a:defRPr sz="900" b="0">
+                <a:solidFill>
+                  <a:srgbClr val="14243A"/>
+                </a:solidFill>
+                <a:latin typeface="Segoe UI"/>
+                <a:ea typeface="Segoe UI"/>
+                <a:cs typeface="Segoe UI"/>
+              </a:defRPr>
+            </a:lvl6pPr>
+            <a:lvl7pPr algn="ctr">
+              <a:defRPr sz="900" b="0">
+                <a:solidFill>
+                  <a:srgbClr val="14243A"/>
+                </a:solidFill>
+                <a:latin typeface="Segoe UI"/>
+                <a:ea typeface="Segoe UI"/>
+                <a:cs typeface="Segoe UI"/>
+              </a:defRPr>
+            </a:lvl7pPr>
+            <a:lvl8pPr algn="ctr">
+              <a:defRPr sz="900" b="0">
+                <a:solidFill>
+                  <a:srgbClr val="14243A"/>
+                </a:solidFill>
+                <a:latin typeface="Segoe UI"/>
+                <a:ea typeface="Segoe UI"/>
+                <a:cs typeface="Segoe UI"/>
+              </a:defRPr>
+            </a:lvl8pPr>
+            <a:lvl9pPr algn="ctr">
+              <a:defRPr sz="900" b="0">
+                <a:solidFill>
+                  <a:srgbClr val="14243A"/>
+                </a:solidFill>
+                <a:latin typeface="Segoe UI"/>
+                <a:ea typeface="Segoe UI"/>
+                <a:cs typeface="Segoe UI"/>
+              </a:defRPr>
+            </a:lvl9pPr>
+          </a:lstStyle>
           <a:p xmlns:a="http://schemas.openxmlformats.org/drawingml/2006/main">
             <a:pPr algn="ctr">
               <a:lnSpc>
                 <a:spcPct val="112000"/>
               </a:lnSpc>
               <a:buNone/>
-              <a:defRPr sz="638" b="0">
-                <a:solidFill>
-                  <a:srgbClr val="4D607D"/>
-                </a:solidFill>
-                <a:latin typeface="Malgun Gothic"/>
-                <a:ea typeface="Malgun Gothic"/>
-                <a:cs typeface="Malgun Gothic"/>
+              <a:defRPr sz="900" b="0">
+                <a:solidFill>
+                  <a:srgbClr val="14243A"/>
+                </a:solidFill>
+                <a:latin typeface="Segoe UI"/>
+                <a:ea typeface="Segoe UI"/>
+                <a:cs typeface="Segoe UI"/>
               </a:defRPr>
             </a:pPr>
             <a:r>
-              <a:rPr sz="638" b="0">
-                <a:solidFill>
-                  <a:srgbClr val="4D607D"/>
-                </a:solidFill>
-                <a:latin typeface="Malgun Gothic"/>
-                <a:ea typeface="Malgun Gothic"/>
-                <a:cs typeface="Malgun Gothic"/>
+              <a:rPr sz="900" b="0">
+                <a:solidFill>
+                  <a:srgbClr val="14243A"/>
+                </a:solidFill>
+                <a:latin typeface="Segoe UI"/>
+                <a:ea typeface="Segoe UI"/>
+                <a:cs typeface="Segoe UI"/>
               </a:rPr>
               <a:t>github.io/CHENGHAO-QUAN</a:t>
+            </a:r>
+          </a:p>
+        </p:txBody>
+      </p:sp>
+      <p:sp>
+        <p:nvSpPr>
+          <p:cNvPr id="45" name="approved-brand-line">
+            <a:extLst xmlns:a="http://schemas.openxmlformats.org/drawingml/2006/main">
+              <a:ext uri="{FF2B5EF4-FFF2-40B4-BE49-F238E27FC236}">
+                <a16:creationId xmlns:a16="http://schemas.microsoft.com/office/drawing/2014/main" id="{43285F10-7088-4629-81EC-8F409127820F}"/>
+              </a:ext>
+            </a:extLst>
+          </p:cNvPr>
+          <p:cNvSpPr>
+            <a:spLocks xmlns:a="http://schemas.openxmlformats.org/drawingml/2006/main" noGrp="1"/>
+          </p:cNvSpPr>
+          <p:nvPr/>
+        </p:nvSpPr>
+        <p:spPr>
+          <a:xfrm xmlns:a="http://schemas.openxmlformats.org/drawingml/2006/main">
+            <a:off x="609600" y="1628775"/>
+            <a:ext cx="7810500" cy="419100"/>
+          </a:xfrm>
+          <a:prstGeom xmlns:a="http://schemas.openxmlformats.org/drawingml/2006/main" prst="rect">
+            <a:avLst/>
+          </a:prstGeom>
+          <a:noFill xmlns:a="http://schemas.openxmlformats.org/drawingml/2006/main"/>
+          <a:ln xmlns:a="http://schemas.openxmlformats.org/drawingml/2006/main" w="0">
+            <a:noFill/>
+          </a:ln>
+        </p:spPr>
+        <p:txBody>
+          <a:bodyPr xmlns:a="http://schemas.openxmlformats.org/drawingml/2006/main" wrap="square" lIns="0" tIns="0" rIns="0" bIns="0" anchor="t">
+            <a:noAutofit/>
+          </a:bodyPr>
+          <a:lstStyle xmlns:a="http://schemas.openxmlformats.org/drawingml/2006/main">
+            <a:defPPr algn="l">
+              <a:defRPr sz="2250" b="1">
+                <a:solidFill>
+                  <a:srgbClr val="2456D8"/>
+                </a:solidFill>
+                <a:latin typeface="Malgun Gothic"/>
+                <a:ea typeface="Malgun Gothic"/>
+                <a:cs typeface="Malgun Gothic"/>
+              </a:defRPr>
+            </a:defPPr>
+            <a:lvl1pPr algn="l">
+              <a:defRPr sz="2250" b="1">
+                <a:solidFill>
+                  <a:srgbClr val="2456D8"/>
+                </a:solidFill>
+                <a:latin typeface="Malgun Gothic"/>
+                <a:ea typeface="Malgun Gothic"/>
+                <a:cs typeface="Malgun Gothic"/>
+              </a:defRPr>
+            </a:lvl1pPr>
+            <a:lvl2pPr algn="l">
+              <a:defRPr sz="2250" b="1">
+                <a:solidFill>
+                  <a:srgbClr val="2456D8"/>
+                </a:solidFill>
+                <a:latin typeface="Malgun Gothic"/>
+                <a:ea typeface="Malgun Gothic"/>
+                <a:cs typeface="Malgun Gothic"/>
+              </a:defRPr>
+            </a:lvl2pPr>
+            <a:lvl3pPr algn="l">
+              <a:defRPr sz="2250" b="1">
+                <a:solidFill>
+                  <a:srgbClr val="2456D8"/>
+                </a:solidFill>
+                <a:latin typeface="Malgun Gothic"/>
+                <a:ea typeface="Malgun Gothic"/>
+                <a:cs typeface="Malgun Gothic"/>
+              </a:defRPr>
+            </a:lvl3pPr>
+            <a:lvl4pPr algn="l">
+              <a:defRPr sz="2250" b="1">
+                <a:solidFill>
+                  <a:srgbClr val="2456D8"/>
+                </a:solidFill>
+                <a:latin typeface="Malgun Gothic"/>
+                <a:ea typeface="Malgun Gothic"/>
+                <a:cs typeface="Malgun Gothic"/>
+              </a:defRPr>
+            </a:lvl4pPr>
+            <a:lvl5pPr algn="l">
+              <a:defRPr sz="2250" b="1">
+                <a:solidFill>
+                  <a:srgbClr val="2456D8"/>
+                </a:solidFill>
+                <a:latin typeface="Malgun Gothic"/>
+                <a:ea typeface="Malgun Gothic"/>
+                <a:cs typeface="Malgun Gothic"/>
+              </a:defRPr>
+            </a:lvl5pPr>
+            <a:lvl6pPr algn="l">
+              <a:defRPr sz="2250" b="1">
+                <a:solidFill>
+                  <a:srgbClr val="2456D8"/>
+                </a:solidFill>
+                <a:latin typeface="Malgun Gothic"/>
+                <a:ea typeface="Malgun Gothic"/>
+                <a:cs typeface="Malgun Gothic"/>
+              </a:defRPr>
+            </a:lvl6pPr>
+            <a:lvl7pPr algn="l">
+              <a:defRPr sz="2250" b="1">
+                <a:solidFill>
+                  <a:srgbClr val="2456D8"/>
+                </a:solidFill>
+                <a:latin typeface="Malgun Gothic"/>
+                <a:ea typeface="Malgun Gothic"/>
+                <a:cs typeface="Malgun Gothic"/>
+              </a:defRPr>
+            </a:lvl7pPr>
+            <a:lvl8pPr algn="l">
+              <a:defRPr sz="2250" b="1">
+                <a:solidFill>
+                  <a:srgbClr val="2456D8"/>
+                </a:solidFill>
+                <a:latin typeface="Malgun Gothic"/>
+                <a:ea typeface="Malgun Gothic"/>
+                <a:cs typeface="Malgun Gothic"/>
+              </a:defRPr>
+            </a:lvl8pPr>
+            <a:lvl9pPr algn="l">
+              <a:defRPr sz="2250" b="1">
+                <a:solidFill>
+                  <a:srgbClr val="2456D8"/>
+                </a:solidFill>
+                <a:latin typeface="Malgun Gothic"/>
+                <a:ea typeface="Malgun Gothic"/>
+                <a:cs typeface="Malgun Gothic"/>
+              </a:defRPr>
+            </a:lvl9pPr>
+          </a:lstStyle>
+          <a:p xmlns:a="http://schemas.openxmlformats.org/drawingml/2006/main">
+            <a:pPr algn="l">
+              <a:defRPr sz="2250" b="1">
+                <a:solidFill>
+                  <a:srgbClr val="2456D8"/>
+                </a:solidFill>
+                <a:latin typeface="Malgun Gothic"/>
+                <a:ea typeface="Malgun Gothic"/>
+                <a:cs typeface="Malgun Gothic"/>
+              </a:defRPr>
+            </a:pPr>
+            <a:r>
+              <a:rPr sz="2250" b="1">
+                <a:solidFill>
+                  <a:srgbClr val="2456D8"/>
+                </a:solidFill>
+                <a:latin typeface="Malgun Gothic"/>
+                <a:ea typeface="Malgun Gothic"/>
+                <a:cs typeface="Malgun Gothic"/>
+              </a:rPr>
+              <a:t>From curiosity to working systems.</a:t>
+            </a:r>
+          </a:p>
+        </p:txBody>
+      </p:sp>
+      <p:sp>
+        <p:nvSpPr>
+          <p:cNvPr id="46" name="original-ambition">
+            <a:extLst xmlns:a="http://schemas.openxmlformats.org/drawingml/2006/main">
+              <a:ext uri="{FF2B5EF4-FFF2-40B4-BE49-F238E27FC236}">
+                <a16:creationId xmlns:a16="http://schemas.microsoft.com/office/drawing/2014/main" id="{25873CBB-16D8-4FE5-8BA6-AAF9565F023F}"/>
+              </a:ext>
+            </a:extLst>
+          </p:cNvPr>
+          <p:cNvSpPr>
+            <a:spLocks xmlns:a="http://schemas.openxmlformats.org/drawingml/2006/main" noGrp="1"/>
+          </p:cNvSpPr>
+          <p:nvPr/>
+        </p:nvSpPr>
+        <p:spPr>
+          <a:xfrm xmlns:a="http://schemas.openxmlformats.org/drawingml/2006/main">
+            <a:off x="609600" y="5562600"/>
+            <a:ext cx="7905750" cy="323850"/>
+          </a:xfrm>
+          <a:prstGeom xmlns:a="http://schemas.openxmlformats.org/drawingml/2006/main" prst="rect">
+            <a:avLst/>
+          </a:prstGeom>
+          <a:noFill xmlns:a="http://schemas.openxmlformats.org/drawingml/2006/main"/>
+          <a:ln xmlns:a="http://schemas.openxmlformats.org/drawingml/2006/main" w="0">
+            <a:noFill/>
+          </a:ln>
+        </p:spPr>
+        <p:txBody>
+          <a:bodyPr xmlns:a="http://schemas.openxmlformats.org/drawingml/2006/main" wrap="square" lIns="0" tIns="0" rIns="0" bIns="0" anchor="t">
+            <a:noAutofit/>
+          </a:bodyPr>
+          <a:lstStyle xmlns:a="http://schemas.openxmlformats.org/drawingml/2006/main">
+            <a:defPPr algn="l">
+              <a:defRPr sz="1500" b="1">
+                <a:solidFill>
+                  <a:srgbClr val="2456D8"/>
+                </a:solidFill>
+                <a:latin typeface="Malgun Gothic"/>
+                <a:ea typeface="Malgun Gothic"/>
+                <a:cs typeface="Malgun Gothic"/>
+              </a:defRPr>
+            </a:defPPr>
+            <a:lvl1pPr algn="l">
+              <a:defRPr sz="1500" b="1">
+                <a:solidFill>
+                  <a:srgbClr val="2456D8"/>
+                </a:solidFill>
+                <a:latin typeface="Malgun Gothic"/>
+                <a:ea typeface="Malgun Gothic"/>
+                <a:cs typeface="Malgun Gothic"/>
+              </a:defRPr>
+            </a:lvl1pPr>
+            <a:lvl2pPr algn="l">
+              <a:defRPr sz="1500" b="1">
+                <a:solidFill>
+                  <a:srgbClr val="2456D8"/>
+                </a:solidFill>
+                <a:latin typeface="Malgun Gothic"/>
+                <a:ea typeface="Malgun Gothic"/>
+                <a:cs typeface="Malgun Gothic"/>
+              </a:defRPr>
+            </a:lvl2pPr>
+            <a:lvl3pPr algn="l">
+              <a:defRPr sz="1500" b="1">
+                <a:solidFill>
+                  <a:srgbClr val="2456D8"/>
+                </a:solidFill>
+                <a:latin typeface="Malgun Gothic"/>
+                <a:ea typeface="Malgun Gothic"/>
+                <a:cs typeface="Malgun Gothic"/>
+              </a:defRPr>
+            </a:lvl3pPr>
+            <a:lvl4pPr algn="l">
+              <a:defRPr sz="1500" b="1">
+                <a:solidFill>
+                  <a:srgbClr val="2456D8"/>
+                </a:solidFill>
+                <a:latin typeface="Malgun Gothic"/>
+                <a:ea typeface="Malgun Gothic"/>
+                <a:cs typeface="Malgun Gothic"/>
+              </a:defRPr>
+            </a:lvl4pPr>
+            <a:lvl5pPr algn="l">
+              <a:defRPr sz="1500" b="1">
+                <a:solidFill>
+                  <a:srgbClr val="2456D8"/>
+                </a:solidFill>
+                <a:latin typeface="Malgun Gothic"/>
+                <a:ea typeface="Malgun Gothic"/>
+                <a:cs typeface="Malgun Gothic"/>
+              </a:defRPr>
+            </a:lvl5pPr>
+            <a:lvl6pPr algn="l">
+              <a:defRPr sz="1500" b="1">
+                <a:solidFill>
+                  <a:srgbClr val="2456D8"/>
+                </a:solidFill>
+                <a:latin typeface="Malgun Gothic"/>
+                <a:ea typeface="Malgun Gothic"/>
+                <a:cs typeface="Malgun Gothic"/>
+              </a:defRPr>
+            </a:lvl6pPr>
+            <a:lvl7pPr algn="l">
+              <a:defRPr sz="1500" b="1">
+                <a:solidFill>
+                  <a:srgbClr val="2456D8"/>
+                </a:solidFill>
+                <a:latin typeface="Malgun Gothic"/>
+                <a:ea typeface="Malgun Gothic"/>
+                <a:cs typeface="Malgun Gothic"/>
+              </a:defRPr>
+            </a:lvl7pPr>
+            <a:lvl8pPr algn="l">
+              <a:defRPr sz="1500" b="1">
+                <a:solidFill>
+                  <a:srgbClr val="2456D8"/>
+                </a:solidFill>
+                <a:latin typeface="Malgun Gothic"/>
+                <a:ea typeface="Malgun Gothic"/>
+                <a:cs typeface="Malgun Gothic"/>
+              </a:defRPr>
+            </a:lvl8pPr>
+            <a:lvl9pPr algn="l">
+              <a:defRPr sz="1500" b="1">
+                <a:solidFill>
+                  <a:srgbClr val="2456D8"/>
+                </a:solidFill>
+                <a:latin typeface="Malgun Gothic"/>
+                <a:ea typeface="Malgun Gothic"/>
+                <a:cs typeface="Malgun Gothic"/>
+              </a:defRPr>
+            </a:lvl9pPr>
+          </a:lstStyle>
+          <a:p xmlns:a="http://schemas.openxmlformats.org/drawingml/2006/main">
+            <a:pPr algn="l">
+              <a:defRPr sz="1500" b="1">
+                <a:solidFill>
+                  <a:srgbClr val="2456D8"/>
+                </a:solidFill>
+                <a:latin typeface="Malgun Gothic"/>
+                <a:ea typeface="Malgun Gothic"/>
+                <a:cs typeface="Malgun Gothic"/>
+              </a:defRPr>
+            </a:pPr>
+            <a:r>
+              <a:rPr sz="1500" b="1">
+                <a:solidFill>
+                  <a:srgbClr val="2456D8"/>
+                </a:solidFill>
+                <a:latin typeface="Malgun Gothic"/>
+                <a:ea typeface="Malgun Gothic"/>
+                <a:cs typeface="Malgun Gothic"/>
+              </a:rPr>
+              <a:t>Patrol &amp; security robotics in the AI era Aiming for No. 1</a:t>
+            </a:r>
+          </a:p>
+        </p:txBody>
+      </p:sp>
+      <p:pic>
+        <p:nvPicPr>
+          <p:cNvPr id="47" name="">
+            <a:extLst xmlns:a="http://schemas.openxmlformats.org/drawingml/2006/main">
+              <a:ext uri="{FF2B5EF4-FFF2-40B4-BE49-F238E27FC236}">
+                <a16:creationId xmlns:a16="http://schemas.microsoft.com/office/drawing/2014/main" id="{54111FD7-545A-4457-87CC-8599B90AAA5F}"/>
+              </a:ext>
+            </a:extLst>
+          </p:cNvPr>
+          <p:cNvPicPr>
+            <a:picLocks xmlns:a="http://schemas.openxmlformats.org/drawingml/2006/main" noChangeAspect="1"/>
+          </p:cNvPicPr>
+          <p:nvPr/>
+        </p:nvPicPr>
+        <p:blipFill>
+          <a:blip xmlns:r="http://schemas.openxmlformats.org/officeDocument/2006/relationships" xmlns:a="http://schemas.openxmlformats.org/drawingml/2006/main" r:embed="Re7ed39bf36634307"/>
+          <a:stretch xmlns:a="http://schemas.openxmlformats.org/drawingml/2006/main"/>
+        </p:blipFill>
+        <p:spPr>
+          <a:xfrm xmlns:a="http://schemas.openxmlformats.org/drawingml/2006/main">
+            <a:off x="8867775" y="577045"/>
+            <a:ext cx="2743200" cy="2884510"/>
+          </a:xfrm>
+          <a:prstGeom xmlns:a="http://schemas.openxmlformats.org/drawingml/2006/main" prst="rect">
+            <a:avLst/>
+          </a:prstGeom>
+        </p:spPr>
+      </p:pic>
+      <p:sp>
+        <p:nvSpPr>
+          <p:cNvPr id="48" name="nuri-caption">
+            <a:extLst xmlns:a="http://schemas.openxmlformats.org/drawingml/2006/main">
+              <a:ext uri="{FF2B5EF4-FFF2-40B4-BE49-F238E27FC236}">
+                <a16:creationId xmlns:a16="http://schemas.microsoft.com/office/drawing/2014/main" id="{FD3D1CED-E260-4EFD-86E0-9FFD155684AC}"/>
+              </a:ext>
+            </a:extLst>
+          </p:cNvPr>
+          <p:cNvSpPr>
+            <a:spLocks xmlns:a="http://schemas.openxmlformats.org/drawingml/2006/main" noGrp="1"/>
+          </p:cNvSpPr>
+          <p:nvPr/>
+        </p:nvSpPr>
+        <p:spPr>
+          <a:xfrm xmlns:a="http://schemas.openxmlformats.org/drawingml/2006/main">
+            <a:off x="8886825" y="3571875"/>
+            <a:ext cx="2705100" cy="266700"/>
+          </a:xfrm>
+          <a:prstGeom xmlns:a="http://schemas.openxmlformats.org/drawingml/2006/main" prst="rect">
+            <a:avLst/>
+          </a:prstGeom>
+          <a:noFill xmlns:a="http://schemas.openxmlformats.org/drawingml/2006/main"/>
+          <a:ln xmlns:a="http://schemas.openxmlformats.org/drawingml/2006/main" w="0">
+            <a:noFill/>
+          </a:ln>
+        </p:spPr>
+        <p:txBody>
+          <a:bodyPr xmlns:a="http://schemas.openxmlformats.org/drawingml/2006/main" wrap="square" lIns="0" tIns="0" rIns="0" bIns="0" anchor="t">
+            <a:noAutofit/>
+          </a:bodyPr>
+          <a:lstStyle xmlns:a="http://schemas.openxmlformats.org/drawingml/2006/main">
+            <a:defPPr algn="ctr">
+              <a:defRPr sz="1500" b="1">
+                <a:solidFill>
+                  <a:srgbClr val="14243A"/>
+                </a:solidFill>
+                <a:latin typeface="Segoe UI"/>
+                <a:ea typeface="Segoe UI"/>
+                <a:cs typeface="Segoe UI"/>
+              </a:defRPr>
+            </a:defPPr>
+            <a:lvl1pPr algn="ctr">
+              <a:defRPr sz="1500" b="1">
+                <a:solidFill>
+                  <a:srgbClr val="14243A"/>
+                </a:solidFill>
+                <a:latin typeface="Segoe UI"/>
+                <a:ea typeface="Segoe UI"/>
+                <a:cs typeface="Segoe UI"/>
+              </a:defRPr>
+            </a:lvl1pPr>
+            <a:lvl2pPr algn="ctr">
+              <a:defRPr sz="1500" b="1">
+                <a:solidFill>
+                  <a:srgbClr val="14243A"/>
+                </a:solidFill>
+                <a:latin typeface="Segoe UI"/>
+                <a:ea typeface="Segoe UI"/>
+                <a:cs typeface="Segoe UI"/>
+              </a:defRPr>
+            </a:lvl2pPr>
+            <a:lvl3pPr algn="ctr">
+              <a:defRPr sz="1500" b="1">
+                <a:solidFill>
+                  <a:srgbClr val="14243A"/>
+                </a:solidFill>
+                <a:latin typeface="Segoe UI"/>
+                <a:ea typeface="Segoe UI"/>
+                <a:cs typeface="Segoe UI"/>
+              </a:defRPr>
+            </a:lvl3pPr>
+            <a:lvl4pPr algn="ctr">
+              <a:defRPr sz="1500" b="1">
+                <a:solidFill>
+                  <a:srgbClr val="14243A"/>
+                </a:solidFill>
+                <a:latin typeface="Segoe UI"/>
+                <a:ea typeface="Segoe UI"/>
+                <a:cs typeface="Segoe UI"/>
+              </a:defRPr>
+            </a:lvl4pPr>
+            <a:lvl5pPr algn="ctr">
+              <a:defRPr sz="1500" b="1">
+                <a:solidFill>
+                  <a:srgbClr val="14243A"/>
+                </a:solidFill>
+                <a:latin typeface="Segoe UI"/>
+                <a:ea typeface="Segoe UI"/>
+                <a:cs typeface="Segoe UI"/>
+              </a:defRPr>
+            </a:lvl5pPr>
+            <a:lvl6pPr algn="ctr">
+              <a:defRPr sz="1500" b="1">
+                <a:solidFill>
+                  <a:srgbClr val="14243A"/>
+                </a:solidFill>
+                <a:latin typeface="Segoe UI"/>
+                <a:ea typeface="Segoe UI"/>
+                <a:cs typeface="Segoe UI"/>
+              </a:defRPr>
+            </a:lvl6pPr>
+            <a:lvl7pPr algn="ctr">
+              <a:defRPr sz="1500" b="1">
+                <a:solidFill>
+                  <a:srgbClr val="14243A"/>
+                </a:solidFill>
+                <a:latin typeface="Segoe UI"/>
+                <a:ea typeface="Segoe UI"/>
+                <a:cs typeface="Segoe UI"/>
+              </a:defRPr>
+            </a:lvl7pPr>
+            <a:lvl8pPr algn="ctr">
+              <a:defRPr sz="1500" b="1">
+                <a:solidFill>
+                  <a:srgbClr val="14243A"/>
+                </a:solidFill>
+                <a:latin typeface="Segoe UI"/>
+                <a:ea typeface="Segoe UI"/>
+                <a:cs typeface="Segoe UI"/>
+              </a:defRPr>
+            </a:lvl8pPr>
+            <a:lvl9pPr algn="ctr">
+              <a:defRPr sz="1500" b="1">
+                <a:solidFill>
+                  <a:srgbClr val="14243A"/>
+                </a:solidFill>
+                <a:latin typeface="Segoe UI"/>
+                <a:ea typeface="Segoe UI"/>
+                <a:cs typeface="Segoe UI"/>
+              </a:defRPr>
+            </a:lvl9pPr>
+          </a:lstStyle>
+          <a:p xmlns:a="http://schemas.openxmlformats.org/drawingml/2006/main">
+            <a:pPr algn="ctr">
+              <a:defRPr sz="1500" b="1">
+                <a:solidFill>
+                  <a:srgbClr val="14243A"/>
+                </a:solidFill>
+                <a:latin typeface="Segoe UI"/>
+                <a:ea typeface="Segoe UI"/>
+                <a:cs typeface="Segoe UI"/>
+              </a:defRPr>
+            </a:pPr>
+            <a:r>
+              <a:rPr sz="1500" b="1">
+                <a:solidFill>
+                  <a:srgbClr val="14243A"/>
+                </a:solidFill>
+                <a:latin typeface="Segoe UI"/>
+                <a:ea typeface="Segoe UI"/>
+                <a:cs typeface="Segoe UI"/>
+              </a:rPr>
+              <a:t>Nuri</a:t>
+            </a:r>
+          </a:p>
+        </p:txBody>
+      </p:sp>
+      <p:sp>
+        <p:nvSpPr>
+          <p:cNvPr id="49" name="community-caption">
+            <a:extLst xmlns:a="http://schemas.openxmlformats.org/drawingml/2006/main">
+              <a:ext uri="{FF2B5EF4-FFF2-40B4-BE49-F238E27FC236}">
+                <a16:creationId xmlns:a16="http://schemas.microsoft.com/office/drawing/2014/main" id="{25B84D06-414A-4E8D-AA09-AA166B6DEECF}"/>
+              </a:ext>
+            </a:extLst>
+          </p:cNvPr>
+          <p:cNvSpPr>
+            <a:spLocks xmlns:a="http://schemas.openxmlformats.org/drawingml/2006/main" noGrp="1"/>
+          </p:cNvSpPr>
+          <p:nvPr/>
+        </p:nvSpPr>
+        <p:spPr>
+          <a:xfrm xmlns:a="http://schemas.openxmlformats.org/drawingml/2006/main">
+            <a:off x="8648700" y="3905250"/>
+            <a:ext cx="3190875" cy="247650"/>
+          </a:xfrm>
+          <a:prstGeom xmlns:a="http://schemas.openxmlformats.org/drawingml/2006/main" prst="rect">
+            <a:avLst/>
+          </a:prstGeom>
+          <a:noFill xmlns:a="http://schemas.openxmlformats.org/drawingml/2006/main"/>
+          <a:ln xmlns:a="http://schemas.openxmlformats.org/drawingml/2006/main" w="0">
+            <a:noFill/>
+          </a:ln>
+        </p:spPr>
+        <p:txBody>
+          <a:bodyPr xmlns:a="http://schemas.openxmlformats.org/drawingml/2006/main" wrap="square" lIns="0" tIns="0" rIns="0" bIns="0" anchor="t">
+            <a:noAutofit/>
+          </a:bodyPr>
+          <a:lstStyle xmlns:a="http://schemas.openxmlformats.org/drawingml/2006/main">
+            <a:defPPr algn="ctr">
+              <a:defRPr sz="1200" b="0">
+                <a:solidFill>
+                  <a:srgbClr val="14243A"/>
+                </a:solidFill>
+                <a:latin typeface="Segoe UI"/>
+                <a:ea typeface="Segoe UI"/>
+                <a:cs typeface="Segoe UI"/>
+              </a:defRPr>
+            </a:defPPr>
+            <a:lvl1pPr algn="ctr">
+              <a:defRPr sz="1200" b="0">
+                <a:solidFill>
+                  <a:srgbClr val="14243A"/>
+                </a:solidFill>
+                <a:latin typeface="Segoe UI"/>
+                <a:ea typeface="Segoe UI"/>
+                <a:cs typeface="Segoe UI"/>
+              </a:defRPr>
+            </a:lvl1pPr>
+            <a:lvl2pPr algn="ctr">
+              <a:defRPr sz="1200" b="0">
+                <a:solidFill>
+                  <a:srgbClr val="14243A"/>
+                </a:solidFill>
+                <a:latin typeface="Segoe UI"/>
+                <a:ea typeface="Segoe UI"/>
+                <a:cs typeface="Segoe UI"/>
+              </a:defRPr>
+            </a:lvl2pPr>
+            <a:lvl3pPr algn="ctr">
+              <a:defRPr sz="1200" b="0">
+                <a:solidFill>
+                  <a:srgbClr val="14243A"/>
+                </a:solidFill>
+                <a:latin typeface="Segoe UI"/>
+                <a:ea typeface="Segoe UI"/>
+                <a:cs typeface="Segoe UI"/>
+              </a:defRPr>
+            </a:lvl3pPr>
+            <a:lvl4pPr algn="ctr">
+              <a:defRPr sz="1200" b="0">
+                <a:solidFill>
+                  <a:srgbClr val="14243A"/>
+                </a:solidFill>
+                <a:latin typeface="Segoe UI"/>
+                <a:ea typeface="Segoe UI"/>
+                <a:cs typeface="Segoe UI"/>
+              </a:defRPr>
+            </a:lvl4pPr>
+            <a:lvl5pPr algn="ctr">
+              <a:defRPr sz="1200" b="0">
+                <a:solidFill>
+                  <a:srgbClr val="14243A"/>
+                </a:solidFill>
+                <a:latin typeface="Segoe UI"/>
+                <a:ea typeface="Segoe UI"/>
+                <a:cs typeface="Segoe UI"/>
+              </a:defRPr>
+            </a:lvl5pPr>
+            <a:lvl6pPr algn="ctr">
+              <a:defRPr sz="1200" b="0">
+                <a:solidFill>
+                  <a:srgbClr val="14243A"/>
+                </a:solidFill>
+                <a:latin typeface="Segoe UI"/>
+                <a:ea typeface="Segoe UI"/>
+                <a:cs typeface="Segoe UI"/>
+              </a:defRPr>
+            </a:lvl6pPr>
+            <a:lvl7pPr algn="ctr">
+              <a:defRPr sz="1200" b="0">
+                <a:solidFill>
+                  <a:srgbClr val="14243A"/>
+                </a:solidFill>
+                <a:latin typeface="Segoe UI"/>
+                <a:ea typeface="Segoe UI"/>
+                <a:cs typeface="Segoe UI"/>
+              </a:defRPr>
+            </a:lvl7pPr>
+            <a:lvl8pPr algn="ctr">
+              <a:defRPr sz="1200" b="0">
+                <a:solidFill>
+                  <a:srgbClr val="14243A"/>
+                </a:solidFill>
+                <a:latin typeface="Segoe UI"/>
+                <a:ea typeface="Segoe UI"/>
+                <a:cs typeface="Segoe UI"/>
+              </a:defRPr>
+            </a:lvl8pPr>
+            <a:lvl9pPr algn="ctr">
+              <a:defRPr sz="1200" b="0">
+                <a:solidFill>
+                  <a:srgbClr val="14243A"/>
+                </a:solidFill>
+                <a:latin typeface="Segoe UI"/>
+                <a:ea typeface="Segoe UI"/>
+                <a:cs typeface="Segoe UI"/>
+              </a:defRPr>
+            </a:lvl9pPr>
+          </a:lstStyle>
+          <a:p xmlns:a="http://schemas.openxmlformats.org/drawingml/2006/main">
+            <a:pPr algn="ctr">
+              <a:defRPr sz="1200" b="0">
+                <a:solidFill>
+                  <a:srgbClr val="14243A"/>
+                </a:solidFill>
+                <a:latin typeface="Segoe UI"/>
+                <a:ea typeface="Segoe UI"/>
+                <a:cs typeface="Segoe UI"/>
+              </a:defRPr>
+            </a:pPr>
+            <a:r>
+              <a:rPr sz="1200" b="0">
+                <a:solidFill>
+                  <a:srgbClr val="14243A"/>
+                </a:solidFill>
+                <a:latin typeface="Segoe UI"/>
+                <a:ea typeface="Segoe UI"/>
+                <a:cs typeface="Segoe UI"/>
+              </a:rPr>
+              <a:t>Community: SUNSHINE STUDIO</a:t>
             </a:r>
           </a:p>
         </p:txBody>

--- a/downloads/chenghao_physical_ai_self_intro_en.pptx
+++ b/downloads/chenghao_physical_ai_self_intro_en.pptx
@@ -2,13 +2,13 @@
 <file path=ppt/presentation.xml><?xml version="1.0" encoding="utf-8"?>
 <p:presentation xmlns:p="http://schemas.openxmlformats.org/presentationml/2006/main">
   <p:sldMasterIdLst>
-    <p:sldMasterId xmlns:r="http://schemas.openxmlformats.org/officeDocument/2006/relationships" id="2147483648" r:id="Rfae4b0cea297437e"/>
+    <p:sldMasterId xmlns:r="http://schemas.openxmlformats.org/officeDocument/2006/relationships" id="2147483648" r:id="Rb096a02c1dd84da1"/>
   </p:sldMasterIdLst>
   <p:notesMasterIdLst>
-    <p:notesMasterId xmlns:r="http://schemas.openxmlformats.org/officeDocument/2006/relationships" r:id="R75aca69d15804b0e"/>
+    <p:notesMasterId xmlns:r="http://schemas.openxmlformats.org/officeDocument/2006/relationships" r:id="Rb78a05a3bfdc48ad"/>
   </p:notesMasterIdLst>
   <p:sldIdLst>
-    <p:sldId xmlns:r="http://schemas.openxmlformats.org/officeDocument/2006/relationships" id="256" r:id="Rc6b5742e18354a9b"/>
+    <p:sldId xmlns:r="http://schemas.openxmlformats.org/officeDocument/2006/relationships" id="256" r:id="R22846a0faeee4d3a"/>
   </p:sldIdLst>
   <p:sldSz cx="12192000" cy="6858000"/>
   <p:notesSz cx="6858000" cy="9144000"/>
@@ -565,7 +565,7 @@
   </p:cSld>
   <p:clrMap bg1="lt1" tx1="dk1" bg2="lt2" tx2="dk2" accent1="accent1" accent2="accent2" accent3="accent3" accent4="accent4" accent5="accent5" accent6="accent6" hlink="hlink" folHlink="folHlink"/>
   <p:sldLayoutIdLst>
-    <p:sldLayoutId xmlns:r="http://schemas.openxmlformats.org/officeDocument/2006/relationships" id="2147483649" r:id="R53c0d98f5ab3406d"/>
+    <p:sldLayoutId xmlns:r="http://schemas.openxmlformats.org/officeDocument/2006/relationships" id="2147483649" r:id="R1abbedfbbd2340ca"/>
   </p:sldLayoutIdLst>
   <p:txStyles>
     <p:titleStyle>
@@ -1155,6 +1155,7 @@
               </a:defRPr>
             </a:defPPr>
             <a:lvl1pPr algn="l">
+              <a:buNone/>
               <a:defRPr sz="1350" b="1">
                 <a:solidFill>
                   <a:srgbClr val="2456D8"/>
@@ -1165,6 +1166,7 @@
               </a:defRPr>
             </a:lvl1pPr>
             <a:lvl2pPr algn="l">
+              <a:buNone/>
               <a:defRPr sz="1350" b="1">
                 <a:solidFill>
                   <a:srgbClr val="2456D8"/>
@@ -1175,6 +1177,7 @@
               </a:defRPr>
             </a:lvl2pPr>
             <a:lvl3pPr algn="l">
+              <a:buNone/>
               <a:defRPr sz="1350" b="1">
                 <a:solidFill>
                   <a:srgbClr val="2456D8"/>
@@ -1185,6 +1188,7 @@
               </a:defRPr>
             </a:lvl3pPr>
             <a:lvl4pPr algn="l">
+              <a:buNone/>
               <a:defRPr sz="1350" b="1">
                 <a:solidFill>
                   <a:srgbClr val="2456D8"/>
@@ -1195,6 +1199,7 @@
               </a:defRPr>
             </a:lvl4pPr>
             <a:lvl5pPr algn="l">
+              <a:buNone/>
               <a:defRPr sz="1350" b="1">
                 <a:solidFill>
                   <a:srgbClr val="2456D8"/>
@@ -1205,6 +1210,7 @@
               </a:defRPr>
             </a:lvl5pPr>
             <a:lvl6pPr algn="l">
+              <a:buNone/>
               <a:defRPr sz="1350" b="1">
                 <a:solidFill>
                   <a:srgbClr val="2456D8"/>
@@ -1215,6 +1221,7 @@
               </a:defRPr>
             </a:lvl6pPr>
             <a:lvl7pPr algn="l">
+              <a:buNone/>
               <a:defRPr sz="1350" b="1">
                 <a:solidFill>
                   <a:srgbClr val="2456D8"/>
@@ -1225,6 +1232,7 @@
               </a:defRPr>
             </a:lvl7pPr>
             <a:lvl8pPr algn="l">
+              <a:buNone/>
               <a:defRPr sz="1350" b="1">
                 <a:solidFill>
                   <a:srgbClr val="2456D8"/>
@@ -1235,6 +1243,7 @@
               </a:defRPr>
             </a:lvl8pPr>
             <a:lvl9pPr algn="l">
+              <a:buNone/>
               <a:defRPr sz="1350" b="1">
                 <a:solidFill>
                   <a:srgbClr val="2456D8"/>
@@ -1318,6 +1327,7 @@
               </a:defRPr>
             </a:defPPr>
             <a:lvl1pPr algn="l">
+              <a:buNone/>
               <a:defRPr sz="4350" b="1">
                 <a:solidFill>
                   <a:srgbClr val="14243A"/>
@@ -1328,6 +1338,7 @@
               </a:defRPr>
             </a:lvl1pPr>
             <a:lvl2pPr algn="l">
+              <a:buNone/>
               <a:defRPr sz="4350" b="1">
                 <a:solidFill>
                   <a:srgbClr val="14243A"/>
@@ -1338,6 +1349,7 @@
               </a:defRPr>
             </a:lvl2pPr>
             <a:lvl3pPr algn="l">
+              <a:buNone/>
               <a:defRPr sz="4350" b="1">
                 <a:solidFill>
                   <a:srgbClr val="14243A"/>
@@ -1348,6 +1360,7 @@
               </a:defRPr>
             </a:lvl3pPr>
             <a:lvl4pPr algn="l">
+              <a:buNone/>
               <a:defRPr sz="4350" b="1">
                 <a:solidFill>
                   <a:srgbClr val="14243A"/>
@@ -1358,6 +1371,7 @@
               </a:defRPr>
             </a:lvl4pPr>
             <a:lvl5pPr algn="l">
+              <a:buNone/>
               <a:defRPr sz="4350" b="1">
                 <a:solidFill>
                   <a:srgbClr val="14243A"/>
@@ -1368,6 +1382,7 @@
               </a:defRPr>
             </a:lvl5pPr>
             <a:lvl6pPr algn="l">
+              <a:buNone/>
               <a:defRPr sz="4350" b="1">
                 <a:solidFill>
                   <a:srgbClr val="14243A"/>
@@ -1378,6 +1393,7 @@
               </a:defRPr>
             </a:lvl6pPr>
             <a:lvl7pPr algn="l">
+              <a:buNone/>
               <a:defRPr sz="4350" b="1">
                 <a:solidFill>
                   <a:srgbClr val="14243A"/>
@@ -1388,6 +1404,7 @@
               </a:defRPr>
             </a:lvl7pPr>
             <a:lvl8pPr algn="l">
+              <a:buNone/>
               <a:defRPr sz="4350" b="1">
                 <a:solidFill>
                   <a:srgbClr val="14243A"/>
@@ -1398,6 +1415,7 @@
               </a:defRPr>
             </a:lvl8pPr>
             <a:lvl9pPr algn="l">
+              <a:buNone/>
               <a:defRPr sz="4350" b="1">
                 <a:solidFill>
                   <a:srgbClr val="14243A"/>
@@ -1453,8 +1471,8 @@
         </p:nvSpPr>
         <p:spPr>
           <a:xfrm xmlns:a="http://schemas.openxmlformats.org/drawingml/2006/main">
-            <a:off x="609600" y="2181225"/>
-            <a:ext cx="8001000" cy="333375"/>
+            <a:off x="609600" y="2419350"/>
+            <a:ext cx="8001000" cy="304800"/>
           </a:xfrm>
           <a:prstGeom xmlns:a="http://schemas.openxmlformats.org/drawingml/2006/main" prst="rect">
             <a:avLst/>
@@ -1481,6 +1499,7 @@
               </a:defRPr>
             </a:defPPr>
             <a:lvl1pPr algn="l">
+              <a:buNone/>
               <a:defRPr sz="1575" b="1">
                 <a:solidFill>
                   <a:srgbClr val="14243A"/>
@@ -1491,6 +1510,7 @@
               </a:defRPr>
             </a:lvl1pPr>
             <a:lvl2pPr algn="l">
+              <a:buNone/>
               <a:defRPr sz="1575" b="1">
                 <a:solidFill>
                   <a:srgbClr val="14243A"/>
@@ -1501,6 +1521,7 @@
               </a:defRPr>
             </a:lvl2pPr>
             <a:lvl3pPr algn="l">
+              <a:buNone/>
               <a:defRPr sz="1575" b="1">
                 <a:solidFill>
                   <a:srgbClr val="14243A"/>
@@ -1511,6 +1532,7 @@
               </a:defRPr>
             </a:lvl3pPr>
             <a:lvl4pPr algn="l">
+              <a:buNone/>
               <a:defRPr sz="1575" b="1">
                 <a:solidFill>
                   <a:srgbClr val="14243A"/>
@@ -1521,6 +1543,7 @@
               </a:defRPr>
             </a:lvl4pPr>
             <a:lvl5pPr algn="l">
+              <a:buNone/>
               <a:defRPr sz="1575" b="1">
                 <a:solidFill>
                   <a:srgbClr val="14243A"/>
@@ -1531,6 +1554,7 @@
               </a:defRPr>
             </a:lvl5pPr>
             <a:lvl6pPr algn="l">
+              <a:buNone/>
               <a:defRPr sz="1575" b="1">
                 <a:solidFill>
                   <a:srgbClr val="14243A"/>
@@ -1541,6 +1565,7 @@
               </a:defRPr>
             </a:lvl6pPr>
             <a:lvl7pPr algn="l">
+              <a:buNone/>
               <a:defRPr sz="1575" b="1">
                 <a:solidFill>
                   <a:srgbClr val="14243A"/>
@@ -1551,6 +1576,7 @@
               </a:defRPr>
             </a:lvl7pPr>
             <a:lvl8pPr algn="l">
+              <a:buNone/>
               <a:defRPr sz="1575" b="1">
                 <a:solidFill>
                   <a:srgbClr val="14243A"/>
@@ -1561,6 +1587,7 @@
               </a:defRPr>
             </a:lvl8pPr>
             <a:lvl9pPr algn="l">
+              <a:buNone/>
               <a:defRPr sz="1575" b="1">
                 <a:solidFill>
                   <a:srgbClr val="14243A"/>
@@ -1595,7 +1622,7 @@
                 <a:ea typeface="Malgun Gothic"/>
                 <a:cs typeface="Malgun Gothic"/>
               </a:rPr>
-              <a:t>Dr. 권성호 (QUAN CHENGHAO)  |  Dogu Robotics · Dogu X</a:t>
+              <a:t>Dogu Robotics · Dogu X</a:t>
             </a:r>
           </a:p>
         </p:txBody>
@@ -1616,8 +1643,8 @@
         </p:nvSpPr>
         <p:spPr>
           <a:xfrm xmlns:a="http://schemas.openxmlformats.org/drawingml/2006/main">
-            <a:off x="609600" y="2647950"/>
-            <a:ext cx="7715250" cy="628650"/>
+            <a:off x="609600" y="2838450"/>
+            <a:ext cx="7715250" cy="590550"/>
           </a:xfrm>
           <a:prstGeom xmlns:a="http://schemas.openxmlformats.org/drawingml/2006/main" prst="rect">
             <a:avLst/>
@@ -1644,6 +1671,7 @@
               </a:defRPr>
             </a:defPPr>
             <a:lvl1pPr algn="l">
+              <a:buNone/>
               <a:defRPr sz="1500" b="0">
                 <a:solidFill>
                   <a:srgbClr val="14243A"/>
@@ -1654,6 +1682,7 @@
               </a:defRPr>
             </a:lvl1pPr>
             <a:lvl2pPr algn="l">
+              <a:buNone/>
               <a:defRPr sz="1500" b="0">
                 <a:solidFill>
                   <a:srgbClr val="14243A"/>
@@ -1664,6 +1693,7 @@
               </a:defRPr>
             </a:lvl2pPr>
             <a:lvl3pPr algn="l">
+              <a:buNone/>
               <a:defRPr sz="1500" b="0">
                 <a:solidFill>
                   <a:srgbClr val="14243A"/>
@@ -1674,6 +1704,7 @@
               </a:defRPr>
             </a:lvl3pPr>
             <a:lvl4pPr algn="l">
+              <a:buNone/>
               <a:defRPr sz="1500" b="0">
                 <a:solidFill>
                   <a:srgbClr val="14243A"/>
@@ -1684,6 +1715,7 @@
               </a:defRPr>
             </a:lvl4pPr>
             <a:lvl5pPr algn="l">
+              <a:buNone/>
               <a:defRPr sz="1500" b="0">
                 <a:solidFill>
                   <a:srgbClr val="14243A"/>
@@ -1694,6 +1726,7 @@
               </a:defRPr>
             </a:lvl5pPr>
             <a:lvl6pPr algn="l">
+              <a:buNone/>
               <a:defRPr sz="1500" b="0">
                 <a:solidFill>
                   <a:srgbClr val="14243A"/>
@@ -1704,6 +1737,7 @@
               </a:defRPr>
             </a:lvl6pPr>
             <a:lvl7pPr algn="l">
+              <a:buNone/>
               <a:defRPr sz="1500" b="0">
                 <a:solidFill>
                   <a:srgbClr val="14243A"/>
@@ -1714,6 +1748,7 @@
               </a:defRPr>
             </a:lvl7pPr>
             <a:lvl8pPr algn="l">
+              <a:buNone/>
               <a:defRPr sz="1500" b="0">
                 <a:solidFill>
                   <a:srgbClr val="14243A"/>
@@ -1724,6 +1759,7 @@
               </a:defRPr>
             </a:lvl8pPr>
             <a:lvl9pPr algn="l">
+              <a:buNone/>
               <a:defRPr sz="1500" b="0">
                 <a:solidFill>
                   <a:srgbClr val="14243A"/>
@@ -1806,7 +1842,7 @@
         </p:nvSpPr>
         <p:spPr>
           <a:xfrm xmlns:a="http://schemas.openxmlformats.org/drawingml/2006/main">
-            <a:off x="609600" y="3400425"/>
+            <a:off x="609600" y="3514725"/>
             <a:ext cx="7715250" cy="0"/>
           </a:xfrm>
           <a:prstGeom xmlns:a="http://schemas.openxmlformats.org/drawingml/2006/main" prst="line">
@@ -1837,7 +1873,7 @@
         </p:nvSpPr>
         <p:spPr>
           <a:xfrm xmlns:a="http://schemas.openxmlformats.org/drawingml/2006/main">
-            <a:off x="609600" y="3638550"/>
+            <a:off x="609600" y="3724275"/>
             <a:ext cx="904875" cy="314325"/>
           </a:xfrm>
           <a:prstGeom xmlns:a="http://schemas.openxmlformats.org/drawingml/2006/main" prst="rect">
@@ -1865,6 +1901,7 @@
               </a:defRPr>
             </a:defPPr>
             <a:lvl1pPr algn="l">
+              <a:buNone/>
               <a:defRPr sz="1425" b="1">
                 <a:solidFill>
                   <a:srgbClr val="2456D8"/>
@@ -1875,6 +1912,7 @@
               </a:defRPr>
             </a:lvl1pPr>
             <a:lvl2pPr algn="l">
+              <a:buNone/>
               <a:defRPr sz="1425" b="1">
                 <a:solidFill>
                   <a:srgbClr val="2456D8"/>
@@ -1885,6 +1923,7 @@
               </a:defRPr>
             </a:lvl2pPr>
             <a:lvl3pPr algn="l">
+              <a:buNone/>
               <a:defRPr sz="1425" b="1">
                 <a:solidFill>
                   <a:srgbClr val="2456D8"/>
@@ -1895,6 +1934,7 @@
               </a:defRPr>
             </a:lvl3pPr>
             <a:lvl4pPr algn="l">
+              <a:buNone/>
               <a:defRPr sz="1425" b="1">
                 <a:solidFill>
                   <a:srgbClr val="2456D8"/>
@@ -1905,6 +1945,7 @@
               </a:defRPr>
             </a:lvl4pPr>
             <a:lvl5pPr algn="l">
+              <a:buNone/>
               <a:defRPr sz="1425" b="1">
                 <a:solidFill>
                   <a:srgbClr val="2456D8"/>
@@ -1915,6 +1956,7 @@
               </a:defRPr>
             </a:lvl5pPr>
             <a:lvl6pPr algn="l">
+              <a:buNone/>
               <a:defRPr sz="1425" b="1">
                 <a:solidFill>
                   <a:srgbClr val="2456D8"/>
@@ -1925,6 +1967,7 @@
               </a:defRPr>
             </a:lvl6pPr>
             <a:lvl7pPr algn="l">
+              <a:buNone/>
               <a:defRPr sz="1425" b="1">
                 <a:solidFill>
                   <a:srgbClr val="2456D8"/>
@@ -1935,6 +1978,7 @@
               </a:defRPr>
             </a:lvl7pPr>
             <a:lvl8pPr algn="l">
+              <a:buNone/>
               <a:defRPr sz="1425" b="1">
                 <a:solidFill>
                   <a:srgbClr val="2456D8"/>
@@ -1945,6 +1989,7 @@
               </a:defRPr>
             </a:lvl8pPr>
             <a:lvl9pPr algn="l">
+              <a:buNone/>
               <a:defRPr sz="1425" b="1">
                 <a:solidFill>
                   <a:srgbClr val="2456D8"/>
@@ -2000,7 +2045,7 @@
         </p:nvSpPr>
         <p:spPr>
           <a:xfrm xmlns:a="http://schemas.openxmlformats.org/drawingml/2006/main">
-            <a:off x="1628775" y="3629025"/>
+            <a:off x="1628775" y="3714750"/>
             <a:ext cx="6753225" cy="400050"/>
           </a:xfrm>
           <a:prstGeom xmlns:a="http://schemas.openxmlformats.org/drawingml/2006/main" prst="rect">
@@ -2028,6 +2073,7 @@
               </a:defRPr>
             </a:defPPr>
             <a:lvl1pPr algn="l">
+              <a:buNone/>
               <a:defRPr sz="1500" b="0">
                 <a:solidFill>
                   <a:srgbClr val="14243A"/>
@@ -2038,6 +2084,7 @@
               </a:defRPr>
             </a:lvl1pPr>
             <a:lvl2pPr algn="l">
+              <a:buNone/>
               <a:defRPr sz="1500" b="0">
                 <a:solidFill>
                   <a:srgbClr val="14243A"/>
@@ -2048,6 +2095,7 @@
               </a:defRPr>
             </a:lvl2pPr>
             <a:lvl3pPr algn="l">
+              <a:buNone/>
               <a:defRPr sz="1500" b="0">
                 <a:solidFill>
                   <a:srgbClr val="14243A"/>
@@ -2058,6 +2106,7 @@
               </a:defRPr>
             </a:lvl3pPr>
             <a:lvl4pPr algn="l">
+              <a:buNone/>
               <a:defRPr sz="1500" b="0">
                 <a:solidFill>
                   <a:srgbClr val="14243A"/>
@@ -2068,6 +2117,7 @@
               </a:defRPr>
             </a:lvl4pPr>
             <a:lvl5pPr algn="l">
+              <a:buNone/>
               <a:defRPr sz="1500" b="0">
                 <a:solidFill>
                   <a:srgbClr val="14243A"/>
@@ -2078,6 +2128,7 @@
               </a:defRPr>
             </a:lvl5pPr>
             <a:lvl6pPr algn="l">
+              <a:buNone/>
               <a:defRPr sz="1500" b="0">
                 <a:solidFill>
                   <a:srgbClr val="14243A"/>
@@ -2088,6 +2139,7 @@
               </a:defRPr>
             </a:lvl6pPr>
             <a:lvl7pPr algn="l">
+              <a:buNone/>
               <a:defRPr sz="1500" b="0">
                 <a:solidFill>
                   <a:srgbClr val="14243A"/>
@@ -2098,6 +2150,7 @@
               </a:defRPr>
             </a:lvl7pPr>
             <a:lvl8pPr algn="l">
+              <a:buNone/>
               <a:defRPr sz="1500" b="0">
                 <a:solidFill>
                   <a:srgbClr val="14243A"/>
@@ -2108,6 +2161,7 @@
               </a:defRPr>
             </a:lvl8pPr>
             <a:lvl9pPr algn="l">
+              <a:buNone/>
               <a:defRPr sz="1500" b="0">
                 <a:solidFill>
                   <a:srgbClr val="14243A"/>
@@ -2163,7 +2217,7 @@
         </p:nvSpPr>
         <p:spPr>
           <a:xfrm xmlns:a="http://schemas.openxmlformats.org/drawingml/2006/main">
-            <a:off x="609600" y="4086225"/>
+            <a:off x="609600" y="4171950"/>
             <a:ext cx="904875" cy="314325"/>
           </a:xfrm>
           <a:prstGeom xmlns:a="http://schemas.openxmlformats.org/drawingml/2006/main" prst="rect">
@@ -2191,6 +2245,7 @@
               </a:defRPr>
             </a:defPPr>
             <a:lvl1pPr algn="l">
+              <a:buNone/>
               <a:defRPr sz="1425" b="1">
                 <a:solidFill>
                   <a:srgbClr val="2456D8"/>
@@ -2201,6 +2256,7 @@
               </a:defRPr>
             </a:lvl1pPr>
             <a:lvl2pPr algn="l">
+              <a:buNone/>
               <a:defRPr sz="1425" b="1">
                 <a:solidFill>
                   <a:srgbClr val="2456D8"/>
@@ -2211,6 +2267,7 @@
               </a:defRPr>
             </a:lvl2pPr>
             <a:lvl3pPr algn="l">
+              <a:buNone/>
               <a:defRPr sz="1425" b="1">
                 <a:solidFill>
                   <a:srgbClr val="2456D8"/>
@@ -2221,6 +2278,7 @@
               </a:defRPr>
             </a:lvl3pPr>
             <a:lvl4pPr algn="l">
+              <a:buNone/>
               <a:defRPr sz="1425" b="1">
                 <a:solidFill>
                   <a:srgbClr val="2456D8"/>
@@ -2231,6 +2289,7 @@
               </a:defRPr>
             </a:lvl4pPr>
             <a:lvl5pPr algn="l">
+              <a:buNone/>
               <a:defRPr sz="1425" b="1">
                 <a:solidFill>
                   <a:srgbClr val="2456D8"/>
@@ -2241,6 +2300,7 @@
               </a:defRPr>
             </a:lvl5pPr>
             <a:lvl6pPr algn="l">
+              <a:buNone/>
               <a:defRPr sz="1425" b="1">
                 <a:solidFill>
                   <a:srgbClr val="2456D8"/>
@@ -2251,6 +2311,7 @@
               </a:defRPr>
             </a:lvl6pPr>
             <a:lvl7pPr algn="l">
+              <a:buNone/>
               <a:defRPr sz="1425" b="1">
                 <a:solidFill>
                   <a:srgbClr val="2456D8"/>
@@ -2261,6 +2322,7 @@
               </a:defRPr>
             </a:lvl7pPr>
             <a:lvl8pPr algn="l">
+              <a:buNone/>
               <a:defRPr sz="1425" b="1">
                 <a:solidFill>
                   <a:srgbClr val="2456D8"/>
@@ -2271,6 +2333,7 @@
               </a:defRPr>
             </a:lvl8pPr>
             <a:lvl9pPr algn="l">
+              <a:buNone/>
               <a:defRPr sz="1425" b="1">
                 <a:solidFill>
                   <a:srgbClr val="2456D8"/>
@@ -2326,7 +2389,7 @@
         </p:nvSpPr>
         <p:spPr>
           <a:xfrm xmlns:a="http://schemas.openxmlformats.org/drawingml/2006/main">
-            <a:off x="1628775" y="4076700"/>
+            <a:off x="1628775" y="4162425"/>
             <a:ext cx="6753225" cy="400050"/>
           </a:xfrm>
           <a:prstGeom xmlns:a="http://schemas.openxmlformats.org/drawingml/2006/main" prst="rect">
@@ -2354,6 +2417,7 @@
               </a:defRPr>
             </a:defPPr>
             <a:lvl1pPr algn="l">
+              <a:buNone/>
               <a:defRPr sz="1500" b="0">
                 <a:solidFill>
                   <a:srgbClr val="14243A"/>
@@ -2364,6 +2428,7 @@
               </a:defRPr>
             </a:lvl1pPr>
             <a:lvl2pPr algn="l">
+              <a:buNone/>
               <a:defRPr sz="1500" b="0">
                 <a:solidFill>
                   <a:srgbClr val="14243A"/>
@@ -2374,6 +2439,7 @@
               </a:defRPr>
             </a:lvl2pPr>
             <a:lvl3pPr algn="l">
+              <a:buNone/>
               <a:defRPr sz="1500" b="0">
                 <a:solidFill>
                   <a:srgbClr val="14243A"/>
@@ -2384,6 +2450,7 @@
               </a:defRPr>
             </a:lvl3pPr>
             <a:lvl4pPr algn="l">
+              <a:buNone/>
               <a:defRPr sz="1500" b="0">
                 <a:solidFill>
                   <a:srgbClr val="14243A"/>
@@ -2394,6 +2461,7 @@
               </a:defRPr>
             </a:lvl4pPr>
             <a:lvl5pPr algn="l">
+              <a:buNone/>
               <a:defRPr sz="1500" b="0">
                 <a:solidFill>
                   <a:srgbClr val="14243A"/>
@@ -2404,6 +2472,7 @@
               </a:defRPr>
             </a:lvl5pPr>
             <a:lvl6pPr algn="l">
+              <a:buNone/>
               <a:defRPr sz="1500" b="0">
                 <a:solidFill>
                   <a:srgbClr val="14243A"/>
@@ -2414,6 +2483,7 @@
               </a:defRPr>
             </a:lvl6pPr>
             <a:lvl7pPr algn="l">
+              <a:buNone/>
               <a:defRPr sz="1500" b="0">
                 <a:solidFill>
                   <a:srgbClr val="14243A"/>
@@ -2424,6 +2494,7 @@
               </a:defRPr>
             </a:lvl7pPr>
             <a:lvl8pPr algn="l">
+              <a:buNone/>
               <a:defRPr sz="1500" b="0">
                 <a:solidFill>
                   <a:srgbClr val="14243A"/>
@@ -2434,6 +2505,7 @@
               </a:defRPr>
             </a:lvl8pPr>
             <a:lvl9pPr algn="l">
+              <a:buNone/>
               <a:defRPr sz="1500" b="0">
                 <a:solidFill>
                   <a:srgbClr val="14243A"/>
@@ -2489,7 +2561,7 @@
         </p:nvSpPr>
         <p:spPr>
           <a:xfrm xmlns:a="http://schemas.openxmlformats.org/drawingml/2006/main">
-            <a:off x="609600" y="4533900"/>
+            <a:off x="609600" y="4619625"/>
             <a:ext cx="904875" cy="314325"/>
           </a:xfrm>
           <a:prstGeom xmlns:a="http://schemas.openxmlformats.org/drawingml/2006/main" prst="rect">
@@ -2517,6 +2589,7 @@
               </a:defRPr>
             </a:defPPr>
             <a:lvl1pPr algn="l">
+              <a:buNone/>
               <a:defRPr sz="1425" b="1">
                 <a:solidFill>
                   <a:srgbClr val="2456D8"/>
@@ -2527,6 +2600,7 @@
               </a:defRPr>
             </a:lvl1pPr>
             <a:lvl2pPr algn="l">
+              <a:buNone/>
               <a:defRPr sz="1425" b="1">
                 <a:solidFill>
                   <a:srgbClr val="2456D8"/>
@@ -2537,6 +2611,7 @@
               </a:defRPr>
             </a:lvl2pPr>
             <a:lvl3pPr algn="l">
+              <a:buNone/>
               <a:defRPr sz="1425" b="1">
                 <a:solidFill>
                   <a:srgbClr val="2456D8"/>
@@ -2547,6 +2622,7 @@
               </a:defRPr>
             </a:lvl3pPr>
             <a:lvl4pPr algn="l">
+              <a:buNone/>
               <a:defRPr sz="1425" b="1">
                 <a:solidFill>
                   <a:srgbClr val="2456D8"/>
@@ -2557,6 +2633,7 @@
               </a:defRPr>
             </a:lvl4pPr>
             <a:lvl5pPr algn="l">
+              <a:buNone/>
               <a:defRPr sz="1425" b="1">
                 <a:solidFill>
                   <a:srgbClr val="2456D8"/>
@@ -2567,6 +2644,7 @@
               </a:defRPr>
             </a:lvl5pPr>
             <a:lvl6pPr algn="l">
+              <a:buNone/>
               <a:defRPr sz="1425" b="1">
                 <a:solidFill>
                   <a:srgbClr val="2456D8"/>
@@ -2577,6 +2655,7 @@
               </a:defRPr>
             </a:lvl6pPr>
             <a:lvl7pPr algn="l">
+              <a:buNone/>
               <a:defRPr sz="1425" b="1">
                 <a:solidFill>
                   <a:srgbClr val="2456D8"/>
@@ -2587,6 +2666,7 @@
               </a:defRPr>
             </a:lvl7pPr>
             <a:lvl8pPr algn="l">
+              <a:buNone/>
               <a:defRPr sz="1425" b="1">
                 <a:solidFill>
                   <a:srgbClr val="2456D8"/>
@@ -2597,6 +2677,7 @@
               </a:defRPr>
             </a:lvl8pPr>
             <a:lvl9pPr algn="l">
+              <a:buNone/>
               <a:defRPr sz="1425" b="1">
                 <a:solidFill>
                   <a:srgbClr val="2456D8"/>
@@ -2652,7 +2733,7 @@
         </p:nvSpPr>
         <p:spPr>
           <a:xfrm xmlns:a="http://schemas.openxmlformats.org/drawingml/2006/main">
-            <a:off x="1628775" y="4524375"/>
+            <a:off x="1628775" y="4610100"/>
             <a:ext cx="6753225" cy="400050"/>
           </a:xfrm>
           <a:prstGeom xmlns:a="http://schemas.openxmlformats.org/drawingml/2006/main" prst="rect">
@@ -2680,6 +2761,7 @@
               </a:defRPr>
             </a:defPPr>
             <a:lvl1pPr algn="l">
+              <a:buNone/>
               <a:defRPr sz="1500" b="0">
                 <a:solidFill>
                   <a:srgbClr val="14243A"/>
@@ -2690,6 +2772,7 @@
               </a:defRPr>
             </a:lvl1pPr>
             <a:lvl2pPr algn="l">
+              <a:buNone/>
               <a:defRPr sz="1500" b="0">
                 <a:solidFill>
                   <a:srgbClr val="14243A"/>
@@ -2700,6 +2783,7 @@
               </a:defRPr>
             </a:lvl2pPr>
             <a:lvl3pPr algn="l">
+              <a:buNone/>
               <a:defRPr sz="1500" b="0">
                 <a:solidFill>
                   <a:srgbClr val="14243A"/>
@@ -2710,6 +2794,7 @@
               </a:defRPr>
             </a:lvl3pPr>
             <a:lvl4pPr algn="l">
+              <a:buNone/>
               <a:defRPr sz="1500" b="0">
                 <a:solidFill>
                   <a:srgbClr val="14243A"/>
@@ -2720,6 +2805,7 @@
               </a:defRPr>
             </a:lvl4pPr>
             <a:lvl5pPr algn="l">
+              <a:buNone/>
               <a:defRPr sz="1500" b="0">
                 <a:solidFill>
                   <a:srgbClr val="14243A"/>
@@ -2730,6 +2816,7 @@
               </a:defRPr>
             </a:lvl5pPr>
             <a:lvl6pPr algn="l">
+              <a:buNone/>
               <a:defRPr sz="1500" b="0">
                 <a:solidFill>
                   <a:srgbClr val="14243A"/>
@@ -2740,6 +2827,7 @@
               </a:defRPr>
             </a:lvl6pPr>
             <a:lvl7pPr algn="l">
+              <a:buNone/>
               <a:defRPr sz="1500" b="0">
                 <a:solidFill>
                   <a:srgbClr val="14243A"/>
@@ -2750,6 +2838,7 @@
               </a:defRPr>
             </a:lvl7pPr>
             <a:lvl8pPr algn="l">
+              <a:buNone/>
               <a:defRPr sz="1500" b="0">
                 <a:solidFill>
                   <a:srgbClr val="14243A"/>
@@ -2760,6 +2849,7 @@
               </a:defRPr>
             </a:lvl8pPr>
             <a:lvl9pPr algn="l">
+              <a:buNone/>
               <a:defRPr sz="1500" b="0">
                 <a:solidFill>
                   <a:srgbClr val="14243A"/>
@@ -2815,7 +2905,7 @@
         </p:nvSpPr>
         <p:spPr>
           <a:xfrm xmlns:a="http://schemas.openxmlformats.org/drawingml/2006/main">
-            <a:off x="609600" y="4981575"/>
+            <a:off x="609600" y="5067300"/>
             <a:ext cx="904875" cy="314325"/>
           </a:xfrm>
           <a:prstGeom xmlns:a="http://schemas.openxmlformats.org/drawingml/2006/main" prst="rect">
@@ -2843,6 +2933,7 @@
               </a:defRPr>
             </a:defPPr>
             <a:lvl1pPr algn="l">
+              <a:buNone/>
               <a:defRPr sz="1425" b="1">
                 <a:solidFill>
                   <a:srgbClr val="2456D8"/>
@@ -2853,6 +2944,7 @@
               </a:defRPr>
             </a:lvl1pPr>
             <a:lvl2pPr algn="l">
+              <a:buNone/>
               <a:defRPr sz="1425" b="1">
                 <a:solidFill>
                   <a:srgbClr val="2456D8"/>
@@ -2863,6 +2955,7 @@
               </a:defRPr>
             </a:lvl2pPr>
             <a:lvl3pPr algn="l">
+              <a:buNone/>
               <a:defRPr sz="1425" b="1">
                 <a:solidFill>
                   <a:srgbClr val="2456D8"/>
@@ -2873,6 +2966,7 @@
               </a:defRPr>
             </a:lvl3pPr>
             <a:lvl4pPr algn="l">
+              <a:buNone/>
               <a:defRPr sz="1425" b="1">
                 <a:solidFill>
                   <a:srgbClr val="2456D8"/>
@@ -2883,6 +2977,7 @@
               </a:defRPr>
             </a:lvl4pPr>
             <a:lvl5pPr algn="l">
+              <a:buNone/>
               <a:defRPr sz="1425" b="1">
                 <a:solidFill>
                   <a:srgbClr val="2456D8"/>
@@ -2893,6 +2988,7 @@
               </a:defRPr>
             </a:lvl5pPr>
             <a:lvl6pPr algn="l">
+              <a:buNone/>
               <a:defRPr sz="1425" b="1">
                 <a:solidFill>
                   <a:srgbClr val="2456D8"/>
@@ -2903,6 +2999,7 @@
               </a:defRPr>
             </a:lvl6pPr>
             <a:lvl7pPr algn="l">
+              <a:buNone/>
               <a:defRPr sz="1425" b="1">
                 <a:solidFill>
                   <a:srgbClr val="2456D8"/>
@@ -2913,6 +3010,7 @@
               </a:defRPr>
             </a:lvl7pPr>
             <a:lvl8pPr algn="l">
+              <a:buNone/>
               <a:defRPr sz="1425" b="1">
                 <a:solidFill>
                   <a:srgbClr val="2456D8"/>
@@ -2923,6 +3021,7 @@
               </a:defRPr>
             </a:lvl8pPr>
             <a:lvl9pPr algn="l">
+              <a:buNone/>
               <a:defRPr sz="1425" b="1">
                 <a:solidFill>
                   <a:srgbClr val="2456D8"/>
@@ -2978,7 +3077,7 @@
         </p:nvSpPr>
         <p:spPr>
           <a:xfrm xmlns:a="http://schemas.openxmlformats.org/drawingml/2006/main">
-            <a:off x="1628775" y="4972050"/>
+            <a:off x="1628775" y="5057775"/>
             <a:ext cx="6753225" cy="400050"/>
           </a:xfrm>
           <a:prstGeom xmlns:a="http://schemas.openxmlformats.org/drawingml/2006/main" prst="rect">
@@ -3006,6 +3105,7 @@
               </a:defRPr>
             </a:defPPr>
             <a:lvl1pPr algn="l">
+              <a:buNone/>
               <a:defRPr sz="1500" b="0">
                 <a:solidFill>
                   <a:srgbClr val="14243A"/>
@@ -3016,6 +3116,7 @@
               </a:defRPr>
             </a:lvl1pPr>
             <a:lvl2pPr algn="l">
+              <a:buNone/>
               <a:defRPr sz="1500" b="0">
                 <a:solidFill>
                   <a:srgbClr val="14243A"/>
@@ -3026,6 +3127,7 @@
               </a:defRPr>
             </a:lvl2pPr>
             <a:lvl3pPr algn="l">
+              <a:buNone/>
               <a:defRPr sz="1500" b="0">
                 <a:solidFill>
                   <a:srgbClr val="14243A"/>
@@ -3036,6 +3138,7 @@
               </a:defRPr>
             </a:lvl3pPr>
             <a:lvl4pPr algn="l">
+              <a:buNone/>
               <a:defRPr sz="1500" b="0">
                 <a:solidFill>
                   <a:srgbClr val="14243A"/>
@@ -3046,6 +3149,7 @@
               </a:defRPr>
             </a:lvl4pPr>
             <a:lvl5pPr algn="l">
+              <a:buNone/>
               <a:defRPr sz="1500" b="0">
                 <a:solidFill>
                   <a:srgbClr val="14243A"/>
@@ -3056,6 +3160,7 @@
               </a:defRPr>
             </a:lvl5pPr>
             <a:lvl6pPr algn="l">
+              <a:buNone/>
               <a:defRPr sz="1500" b="0">
                 <a:solidFill>
                   <a:srgbClr val="14243A"/>
@@ -3066,6 +3171,7 @@
               </a:defRPr>
             </a:lvl6pPr>
             <a:lvl7pPr algn="l">
+              <a:buNone/>
               <a:defRPr sz="1500" b="0">
                 <a:solidFill>
                   <a:srgbClr val="14243A"/>
@@ -3076,6 +3182,7 @@
               </a:defRPr>
             </a:lvl7pPr>
             <a:lvl8pPr algn="l">
+              <a:buNone/>
               <a:defRPr sz="1500" b="0">
                 <a:solidFill>
                   <a:srgbClr val="14243A"/>
@@ -3086,6 +3193,7 @@
               </a:defRPr>
             </a:lvl8pPr>
             <a:lvl9pPr algn="l">
+              <a:buNone/>
               <a:defRPr sz="1500" b="0">
                 <a:solidFill>
                   <a:srgbClr val="14243A"/>
@@ -3169,6 +3277,7 @@
               </a:defRPr>
             </a:defPPr>
             <a:lvl1pPr algn="l">
+              <a:buNone/>
               <a:defRPr sz="1350" b="0">
                 <a:solidFill>
                   <a:srgbClr val="14243A"/>
@@ -3179,6 +3288,7 @@
               </a:defRPr>
             </a:lvl1pPr>
             <a:lvl2pPr algn="l">
+              <a:buNone/>
               <a:defRPr sz="1350" b="0">
                 <a:solidFill>
                   <a:srgbClr val="14243A"/>
@@ -3189,6 +3299,7 @@
               </a:defRPr>
             </a:lvl2pPr>
             <a:lvl3pPr algn="l">
+              <a:buNone/>
               <a:defRPr sz="1350" b="0">
                 <a:solidFill>
                   <a:srgbClr val="14243A"/>
@@ -3199,6 +3310,7 @@
               </a:defRPr>
             </a:lvl3pPr>
             <a:lvl4pPr algn="l">
+              <a:buNone/>
               <a:defRPr sz="1350" b="0">
                 <a:solidFill>
                   <a:srgbClr val="14243A"/>
@@ -3209,6 +3321,7 @@
               </a:defRPr>
             </a:lvl4pPr>
             <a:lvl5pPr algn="l">
+              <a:buNone/>
               <a:defRPr sz="1350" b="0">
                 <a:solidFill>
                   <a:srgbClr val="14243A"/>
@@ -3219,6 +3332,7 @@
               </a:defRPr>
             </a:lvl5pPr>
             <a:lvl6pPr algn="l">
+              <a:buNone/>
               <a:defRPr sz="1350" b="0">
                 <a:solidFill>
                   <a:srgbClr val="14243A"/>
@@ -3229,6 +3343,7 @@
               </a:defRPr>
             </a:lvl6pPr>
             <a:lvl7pPr algn="l">
+              <a:buNone/>
               <a:defRPr sz="1350" b="0">
                 <a:solidFill>
                   <a:srgbClr val="14243A"/>
@@ -3239,6 +3354,7 @@
               </a:defRPr>
             </a:lvl7pPr>
             <a:lvl8pPr algn="l">
+              <a:buNone/>
               <a:defRPr sz="1350" b="0">
                 <a:solidFill>
                   <a:srgbClr val="14243A"/>
@@ -3249,6 +3365,7 @@
               </a:defRPr>
             </a:lvl8pPr>
             <a:lvl9pPr algn="l">
+              <a:buNone/>
               <a:defRPr sz="1350" b="0">
                 <a:solidFill>
                   <a:srgbClr val="14243A"/>
@@ -3331,7 +3448,7 @@
           <p:cNvPr id="44" name="">
             <a:extLst xmlns:a="http://schemas.openxmlformats.org/drawingml/2006/main">
               <a:ext uri="{FF2B5EF4-FFF2-40B4-BE49-F238E27FC236}">
-                <a16:creationId xmlns:a16="http://schemas.microsoft.com/office/drawing/2014/main" id="{C6B0F997-5DBA-4DF0-8D5C-FF85E52A254C}"/>
+                <a16:creationId xmlns:a16="http://schemas.microsoft.com/office/drawing/2014/main" id="{AFBE2AB8-B03D-4019-AC99-C8E63D13D654}"/>
               </a:ext>
             </a:extLst>
           </p:cNvPr>
@@ -3341,7 +3458,7 @@
           <p:nvPr/>
         </p:nvPicPr>
         <p:blipFill>
-          <a:blip xmlns:r="http://schemas.openxmlformats.org/officeDocument/2006/relationships" xmlns:a="http://schemas.openxmlformats.org/drawingml/2006/main" r:embed="R6ce3dd04ae4347b2"/>
+          <a:blip xmlns:r="http://schemas.openxmlformats.org/officeDocument/2006/relationships" xmlns:a="http://schemas.openxmlformats.org/drawingml/2006/main" r:embed="Rd6441f51cb6c4885"/>
           <a:stretch xmlns:a="http://schemas.openxmlformats.org/drawingml/2006/main"/>
         </p:blipFill>
         <p:spPr>
@@ -3398,6 +3515,7 @@
               </a:defRPr>
             </a:defPPr>
             <a:lvl1pPr algn="ctr">
+              <a:buNone/>
               <a:defRPr sz="1125" b="1">
                 <a:solidFill>
                   <a:srgbClr val="14243A"/>
@@ -3408,6 +3526,7 @@
               </a:defRPr>
             </a:lvl1pPr>
             <a:lvl2pPr algn="ctr">
+              <a:buNone/>
               <a:defRPr sz="1125" b="1">
                 <a:solidFill>
                   <a:srgbClr val="14243A"/>
@@ -3418,6 +3537,7 @@
               </a:defRPr>
             </a:lvl2pPr>
             <a:lvl3pPr algn="ctr">
+              <a:buNone/>
               <a:defRPr sz="1125" b="1">
                 <a:solidFill>
                   <a:srgbClr val="14243A"/>
@@ -3428,6 +3548,7 @@
               </a:defRPr>
             </a:lvl3pPr>
             <a:lvl4pPr algn="ctr">
+              <a:buNone/>
               <a:defRPr sz="1125" b="1">
                 <a:solidFill>
                   <a:srgbClr val="14243A"/>
@@ -3438,6 +3559,7 @@
               </a:defRPr>
             </a:lvl4pPr>
             <a:lvl5pPr algn="ctr">
+              <a:buNone/>
               <a:defRPr sz="1125" b="1">
                 <a:solidFill>
                   <a:srgbClr val="14243A"/>
@@ -3448,6 +3570,7 @@
               </a:defRPr>
             </a:lvl5pPr>
             <a:lvl6pPr algn="ctr">
+              <a:buNone/>
               <a:defRPr sz="1125" b="1">
                 <a:solidFill>
                   <a:srgbClr val="14243A"/>
@@ -3458,6 +3581,7 @@
               </a:defRPr>
             </a:lvl6pPr>
             <a:lvl7pPr algn="ctr">
+              <a:buNone/>
               <a:defRPr sz="1125" b="1">
                 <a:solidFill>
                   <a:srgbClr val="14243A"/>
@@ -3468,6 +3592,7 @@
               </a:defRPr>
             </a:lvl7pPr>
             <a:lvl8pPr algn="ctr">
+              <a:buNone/>
               <a:defRPr sz="1125" b="1">
                 <a:solidFill>
                   <a:srgbClr val="14243A"/>
@@ -3478,6 +3603,7 @@
               </a:defRPr>
             </a:lvl8pPr>
             <a:lvl9pPr algn="ctr">
+              <a:buNone/>
               <a:defRPr sz="1125" b="1">
                 <a:solidFill>
                   <a:srgbClr val="14243A"/>
@@ -3561,6 +3687,7 @@
               </a:defRPr>
             </a:defPPr>
             <a:lvl1pPr algn="ctr">
+              <a:buNone/>
               <a:defRPr sz="900" b="0">
                 <a:solidFill>
                   <a:srgbClr val="14243A"/>
@@ -3571,6 +3698,7 @@
               </a:defRPr>
             </a:lvl1pPr>
             <a:lvl2pPr algn="ctr">
+              <a:buNone/>
               <a:defRPr sz="900" b="0">
                 <a:solidFill>
                   <a:srgbClr val="14243A"/>
@@ -3581,6 +3709,7 @@
               </a:defRPr>
             </a:lvl2pPr>
             <a:lvl3pPr algn="ctr">
+              <a:buNone/>
               <a:defRPr sz="900" b="0">
                 <a:solidFill>
                   <a:srgbClr val="14243A"/>
@@ -3591,6 +3720,7 @@
               </a:defRPr>
             </a:lvl3pPr>
             <a:lvl4pPr algn="ctr">
+              <a:buNone/>
               <a:defRPr sz="900" b="0">
                 <a:solidFill>
                   <a:srgbClr val="14243A"/>
@@ -3601,6 +3731,7 @@
               </a:defRPr>
             </a:lvl4pPr>
             <a:lvl5pPr algn="ctr">
+              <a:buNone/>
               <a:defRPr sz="900" b="0">
                 <a:solidFill>
                   <a:srgbClr val="14243A"/>
@@ -3611,6 +3742,7 @@
               </a:defRPr>
             </a:lvl5pPr>
             <a:lvl6pPr algn="ctr">
+              <a:buNone/>
               <a:defRPr sz="900" b="0">
                 <a:solidFill>
                   <a:srgbClr val="14243A"/>
@@ -3621,6 +3753,7 @@
               </a:defRPr>
             </a:lvl6pPr>
             <a:lvl7pPr algn="ctr">
+              <a:buNone/>
               <a:defRPr sz="900" b="0">
                 <a:solidFill>
                   <a:srgbClr val="14243A"/>
@@ -3631,6 +3764,7 @@
               </a:defRPr>
             </a:lvl7pPr>
             <a:lvl8pPr algn="ctr">
+              <a:buNone/>
               <a:defRPr sz="900" b="0">
                 <a:solidFill>
                   <a:srgbClr val="14243A"/>
@@ -3641,6 +3775,7 @@
               </a:defRPr>
             </a:lvl8pPr>
             <a:lvl9pPr algn="ctr">
+              <a:buNone/>
               <a:defRPr sz="900" b="0">
                 <a:solidFill>
                   <a:srgbClr val="14243A"/>
@@ -3696,7 +3831,7 @@
         </p:nvSpPr>
         <p:spPr>
           <a:xfrm xmlns:a="http://schemas.openxmlformats.org/drawingml/2006/main">
-            <a:off x="609600" y="1628775"/>
+            <a:off x="609600" y="1943100"/>
             <a:ext cx="7810500" cy="419100"/>
           </a:xfrm>
           <a:prstGeom xmlns:a="http://schemas.openxmlformats.org/drawingml/2006/main" prst="rect">
@@ -3723,6 +3858,7 @@
               </a:defRPr>
             </a:defPPr>
             <a:lvl1pPr algn="l">
+              <a:buNone/>
               <a:defRPr sz="2250" b="1">
                 <a:solidFill>
                   <a:srgbClr val="2456D8"/>
@@ -3733,6 +3869,7 @@
               </a:defRPr>
             </a:lvl1pPr>
             <a:lvl2pPr algn="l">
+              <a:buNone/>
               <a:defRPr sz="2250" b="1">
                 <a:solidFill>
                   <a:srgbClr val="2456D8"/>
@@ -3743,6 +3880,7 @@
               </a:defRPr>
             </a:lvl2pPr>
             <a:lvl3pPr algn="l">
+              <a:buNone/>
               <a:defRPr sz="2250" b="1">
                 <a:solidFill>
                   <a:srgbClr val="2456D8"/>
@@ -3753,6 +3891,7 @@
               </a:defRPr>
             </a:lvl3pPr>
             <a:lvl4pPr algn="l">
+              <a:buNone/>
               <a:defRPr sz="2250" b="1">
                 <a:solidFill>
                   <a:srgbClr val="2456D8"/>
@@ -3763,6 +3902,7 @@
               </a:defRPr>
             </a:lvl4pPr>
             <a:lvl5pPr algn="l">
+              <a:buNone/>
               <a:defRPr sz="2250" b="1">
                 <a:solidFill>
                   <a:srgbClr val="2456D8"/>
@@ -3773,6 +3913,7 @@
               </a:defRPr>
             </a:lvl5pPr>
             <a:lvl6pPr algn="l">
+              <a:buNone/>
               <a:defRPr sz="2250" b="1">
                 <a:solidFill>
                   <a:srgbClr val="2456D8"/>
@@ -3783,6 +3924,7 @@
               </a:defRPr>
             </a:lvl6pPr>
             <a:lvl7pPr algn="l">
+              <a:buNone/>
               <a:defRPr sz="2250" b="1">
                 <a:solidFill>
                   <a:srgbClr val="2456D8"/>
@@ -3793,6 +3935,7 @@
               </a:defRPr>
             </a:lvl7pPr>
             <a:lvl8pPr algn="l">
+              <a:buNone/>
               <a:defRPr sz="2250" b="1">
                 <a:solidFill>
                   <a:srgbClr val="2456D8"/>
@@ -3803,6 +3946,7 @@
               </a:defRPr>
             </a:lvl8pPr>
             <a:lvl9pPr algn="l">
+              <a:buNone/>
               <a:defRPr sz="2250" b="1">
                 <a:solidFill>
                   <a:srgbClr val="2456D8"/>
@@ -3815,6 +3959,7 @@
           </a:lstStyle>
           <a:p xmlns:a="http://schemas.openxmlformats.org/drawingml/2006/main">
             <a:pPr algn="l">
+              <a:buNone/>
               <a:defRPr sz="2250" b="1">
                 <a:solidFill>
                   <a:srgbClr val="2456D8"/>
@@ -3881,6 +4026,7 @@
               </a:defRPr>
             </a:defPPr>
             <a:lvl1pPr algn="l">
+              <a:buNone/>
               <a:defRPr sz="1500" b="1">
                 <a:solidFill>
                   <a:srgbClr val="2456D8"/>
@@ -3891,6 +4037,7 @@
               </a:defRPr>
             </a:lvl1pPr>
             <a:lvl2pPr algn="l">
+              <a:buNone/>
               <a:defRPr sz="1500" b="1">
                 <a:solidFill>
                   <a:srgbClr val="2456D8"/>
@@ -3901,6 +4048,7 @@
               </a:defRPr>
             </a:lvl2pPr>
             <a:lvl3pPr algn="l">
+              <a:buNone/>
               <a:defRPr sz="1500" b="1">
                 <a:solidFill>
                   <a:srgbClr val="2456D8"/>
@@ -3911,6 +4059,7 @@
               </a:defRPr>
             </a:lvl3pPr>
             <a:lvl4pPr algn="l">
+              <a:buNone/>
               <a:defRPr sz="1500" b="1">
                 <a:solidFill>
                   <a:srgbClr val="2456D8"/>
@@ -3921,6 +4070,7 @@
               </a:defRPr>
             </a:lvl4pPr>
             <a:lvl5pPr algn="l">
+              <a:buNone/>
               <a:defRPr sz="1500" b="1">
                 <a:solidFill>
                   <a:srgbClr val="2456D8"/>
@@ -3931,6 +4081,7 @@
               </a:defRPr>
             </a:lvl5pPr>
             <a:lvl6pPr algn="l">
+              <a:buNone/>
               <a:defRPr sz="1500" b="1">
                 <a:solidFill>
                   <a:srgbClr val="2456D8"/>
@@ -3941,6 +4092,7 @@
               </a:defRPr>
             </a:lvl6pPr>
             <a:lvl7pPr algn="l">
+              <a:buNone/>
               <a:defRPr sz="1500" b="1">
                 <a:solidFill>
                   <a:srgbClr val="2456D8"/>
@@ -3951,6 +4103,7 @@
               </a:defRPr>
             </a:lvl7pPr>
             <a:lvl8pPr algn="l">
+              <a:buNone/>
               <a:defRPr sz="1500" b="1">
                 <a:solidFill>
                   <a:srgbClr val="2456D8"/>
@@ -3961,6 +4114,7 @@
               </a:defRPr>
             </a:lvl8pPr>
             <a:lvl9pPr algn="l">
+              <a:buNone/>
               <a:defRPr sz="1500" b="1">
                 <a:solidFill>
                   <a:srgbClr val="2456D8"/>
@@ -3973,6 +4127,7 @@
           </a:lstStyle>
           <a:p xmlns:a="http://schemas.openxmlformats.org/drawingml/2006/main">
             <a:pPr algn="l">
+              <a:buNone/>
               <a:defRPr sz="1500" b="1">
                 <a:solidFill>
                   <a:srgbClr val="2456D8"/>
@@ -4001,7 +4156,7 @@
           <p:cNvPr id="47" name="">
             <a:extLst xmlns:a="http://schemas.openxmlformats.org/drawingml/2006/main">
               <a:ext uri="{FF2B5EF4-FFF2-40B4-BE49-F238E27FC236}">
-                <a16:creationId xmlns:a16="http://schemas.microsoft.com/office/drawing/2014/main" id="{54111FD7-545A-4457-87CC-8599B90AAA5F}"/>
+                <a16:creationId xmlns:a16="http://schemas.microsoft.com/office/drawing/2014/main" id="{0A419760-8699-4065-855C-CD72921FA2B3}"/>
               </a:ext>
             </a:extLst>
           </p:cNvPr>
@@ -4011,7 +4166,7 @@
           <p:nvPr/>
         </p:nvPicPr>
         <p:blipFill>
-          <a:blip xmlns:r="http://schemas.openxmlformats.org/officeDocument/2006/relationships" xmlns:a="http://schemas.openxmlformats.org/drawingml/2006/main" r:embed="Re7ed39bf36634307"/>
+          <a:blip xmlns:r="http://schemas.openxmlformats.org/officeDocument/2006/relationships" xmlns:a="http://schemas.openxmlformats.org/drawingml/2006/main" r:embed="R6acea0751c5e4235"/>
           <a:stretch xmlns:a="http://schemas.openxmlformats.org/drawingml/2006/main"/>
         </p:blipFill>
         <p:spPr>
@@ -4067,6 +4222,7 @@
               </a:defRPr>
             </a:defPPr>
             <a:lvl1pPr algn="ctr">
+              <a:buNone/>
               <a:defRPr sz="1500" b="1">
                 <a:solidFill>
                   <a:srgbClr val="14243A"/>
@@ -4077,6 +4233,7 @@
               </a:defRPr>
             </a:lvl1pPr>
             <a:lvl2pPr algn="ctr">
+              <a:buNone/>
               <a:defRPr sz="1500" b="1">
                 <a:solidFill>
                   <a:srgbClr val="14243A"/>
@@ -4087,6 +4244,7 @@
               </a:defRPr>
             </a:lvl2pPr>
             <a:lvl3pPr algn="ctr">
+              <a:buNone/>
               <a:defRPr sz="1500" b="1">
                 <a:solidFill>
                   <a:srgbClr val="14243A"/>
@@ -4097,6 +4255,7 @@
               </a:defRPr>
             </a:lvl3pPr>
             <a:lvl4pPr algn="ctr">
+              <a:buNone/>
               <a:defRPr sz="1500" b="1">
                 <a:solidFill>
                   <a:srgbClr val="14243A"/>
@@ -4107,6 +4266,7 @@
               </a:defRPr>
             </a:lvl4pPr>
             <a:lvl5pPr algn="ctr">
+              <a:buNone/>
               <a:defRPr sz="1500" b="1">
                 <a:solidFill>
                   <a:srgbClr val="14243A"/>
@@ -4117,6 +4277,7 @@
               </a:defRPr>
             </a:lvl5pPr>
             <a:lvl6pPr algn="ctr">
+              <a:buNone/>
               <a:defRPr sz="1500" b="1">
                 <a:solidFill>
                   <a:srgbClr val="14243A"/>
@@ -4127,6 +4288,7 @@
               </a:defRPr>
             </a:lvl6pPr>
             <a:lvl7pPr algn="ctr">
+              <a:buNone/>
               <a:defRPr sz="1500" b="1">
                 <a:solidFill>
                   <a:srgbClr val="14243A"/>
@@ -4137,6 +4299,7 @@
               </a:defRPr>
             </a:lvl7pPr>
             <a:lvl8pPr algn="ctr">
+              <a:buNone/>
               <a:defRPr sz="1500" b="1">
                 <a:solidFill>
                   <a:srgbClr val="14243A"/>
@@ -4147,6 +4310,7 @@
               </a:defRPr>
             </a:lvl8pPr>
             <a:lvl9pPr algn="ctr">
+              <a:buNone/>
               <a:defRPr sz="1500" b="1">
                 <a:solidFill>
                   <a:srgbClr val="14243A"/>
@@ -4159,6 +4323,7 @@
           </a:lstStyle>
           <a:p xmlns:a="http://schemas.openxmlformats.org/drawingml/2006/main">
             <a:pPr algn="ctr">
+              <a:buNone/>
               <a:defRPr sz="1500" b="1">
                 <a:solidFill>
                   <a:srgbClr val="14243A"/>
@@ -4225,6 +4390,7 @@
               </a:defRPr>
             </a:defPPr>
             <a:lvl1pPr algn="ctr">
+              <a:buNone/>
               <a:defRPr sz="1200" b="0">
                 <a:solidFill>
                   <a:srgbClr val="14243A"/>
@@ -4235,6 +4401,7 @@
               </a:defRPr>
             </a:lvl1pPr>
             <a:lvl2pPr algn="ctr">
+              <a:buNone/>
               <a:defRPr sz="1200" b="0">
                 <a:solidFill>
                   <a:srgbClr val="14243A"/>
@@ -4245,6 +4412,7 @@
               </a:defRPr>
             </a:lvl2pPr>
             <a:lvl3pPr algn="ctr">
+              <a:buNone/>
               <a:defRPr sz="1200" b="0">
                 <a:solidFill>
                   <a:srgbClr val="14243A"/>
@@ -4255,6 +4423,7 @@
               </a:defRPr>
             </a:lvl3pPr>
             <a:lvl4pPr algn="ctr">
+              <a:buNone/>
               <a:defRPr sz="1200" b="0">
                 <a:solidFill>
                   <a:srgbClr val="14243A"/>
@@ -4265,6 +4434,7 @@
               </a:defRPr>
             </a:lvl4pPr>
             <a:lvl5pPr algn="ctr">
+              <a:buNone/>
               <a:defRPr sz="1200" b="0">
                 <a:solidFill>
                   <a:srgbClr val="14243A"/>
@@ -4275,6 +4445,7 @@
               </a:defRPr>
             </a:lvl5pPr>
             <a:lvl6pPr algn="ctr">
+              <a:buNone/>
               <a:defRPr sz="1200" b="0">
                 <a:solidFill>
                   <a:srgbClr val="14243A"/>
@@ -4285,6 +4456,7 @@
               </a:defRPr>
             </a:lvl6pPr>
             <a:lvl7pPr algn="ctr">
+              <a:buNone/>
               <a:defRPr sz="1200" b="0">
                 <a:solidFill>
                   <a:srgbClr val="14243A"/>
@@ -4295,6 +4467,7 @@
               </a:defRPr>
             </a:lvl7pPr>
             <a:lvl8pPr algn="ctr">
+              <a:buNone/>
               <a:defRPr sz="1200" b="0">
                 <a:solidFill>
                   <a:srgbClr val="14243A"/>
@@ -4305,6 +4478,7 @@
               </a:defRPr>
             </a:lvl8pPr>
             <a:lvl9pPr algn="ctr">
+              <a:buNone/>
               <a:defRPr sz="1200" b="0">
                 <a:solidFill>
                   <a:srgbClr val="14243A"/>
@@ -4317,6 +4491,7 @@
           </a:lstStyle>
           <a:p xmlns:a="http://schemas.openxmlformats.org/drawingml/2006/main">
             <a:pPr algn="ctr">
+              <a:buNone/>
               <a:defRPr sz="1200" b="0">
                 <a:solidFill>
                   <a:srgbClr val="14243A"/>
@@ -4336,6 +4511,164 @@
                 <a:cs typeface="Segoe UI"/>
               </a:rPr>
               <a:t>Community: SUNSHINE STUDIO</a:t>
+            </a:r>
+          </a:p>
+        </p:txBody>
+      </p:sp>
+      <p:sp>
+        <p:nvSpPr>
+          <p:cNvPr id="50" name="korean-name-line">
+            <a:extLst xmlns:a="http://schemas.openxmlformats.org/drawingml/2006/main">
+              <a:ext uri="{FF2B5EF4-FFF2-40B4-BE49-F238E27FC236}">
+                <a16:creationId xmlns:a16="http://schemas.microsoft.com/office/drawing/2014/main" id="{C677CB20-2305-4310-B40B-78C034F48597}"/>
+              </a:ext>
+            </a:extLst>
+          </p:cNvPr>
+          <p:cNvSpPr>
+            <a:spLocks xmlns:a="http://schemas.openxmlformats.org/drawingml/2006/main" noGrp="1"/>
+          </p:cNvSpPr>
+          <p:nvPr/>
+        </p:nvSpPr>
+        <p:spPr>
+          <a:xfrm xmlns:a="http://schemas.openxmlformats.org/drawingml/2006/main">
+            <a:off x="609600" y="1524000"/>
+            <a:ext cx="7810500" cy="323850"/>
+          </a:xfrm>
+          <a:prstGeom xmlns:a="http://schemas.openxmlformats.org/drawingml/2006/main" prst="rect">
+            <a:avLst/>
+          </a:prstGeom>
+          <a:noFill xmlns:a="http://schemas.openxmlformats.org/drawingml/2006/main"/>
+          <a:ln xmlns:a="http://schemas.openxmlformats.org/drawingml/2006/main" w="0">
+            <a:noFill/>
+          </a:ln>
+        </p:spPr>
+        <p:txBody>
+          <a:bodyPr xmlns:a="http://schemas.openxmlformats.org/drawingml/2006/main" wrap="none" lIns="0" tIns="0" rIns="0" bIns="0" anchor="t">
+            <a:noAutofit/>
+          </a:bodyPr>
+          <a:lstStyle xmlns:a="http://schemas.openxmlformats.org/drawingml/2006/main">
+            <a:defPPr>
+              <a:defRPr sz="1800" b="0">
+                <a:solidFill>
+                  <a:srgbClr val="14243A"/>
+                </a:solidFill>
+                <a:latin typeface="Malgun Gothic"/>
+                <a:ea typeface="Malgun Gothic"/>
+                <a:cs typeface="Malgun Gothic"/>
+              </a:defRPr>
+            </a:defPPr>
+            <a:lvl1pPr>
+              <a:defRPr sz="1800" b="0">
+                <a:solidFill>
+                  <a:srgbClr val="14243A"/>
+                </a:solidFill>
+                <a:latin typeface="Malgun Gothic"/>
+                <a:ea typeface="Malgun Gothic"/>
+                <a:cs typeface="Malgun Gothic"/>
+              </a:defRPr>
+            </a:lvl1pPr>
+            <a:lvl2pPr>
+              <a:defRPr sz="1800" b="0">
+                <a:solidFill>
+                  <a:srgbClr val="14243A"/>
+                </a:solidFill>
+                <a:latin typeface="Malgun Gothic"/>
+                <a:ea typeface="Malgun Gothic"/>
+                <a:cs typeface="Malgun Gothic"/>
+              </a:defRPr>
+            </a:lvl2pPr>
+            <a:lvl3pPr>
+              <a:defRPr sz="1800" b="0">
+                <a:solidFill>
+                  <a:srgbClr val="14243A"/>
+                </a:solidFill>
+                <a:latin typeface="Malgun Gothic"/>
+                <a:ea typeface="Malgun Gothic"/>
+                <a:cs typeface="Malgun Gothic"/>
+              </a:defRPr>
+            </a:lvl3pPr>
+            <a:lvl4pPr>
+              <a:defRPr sz="1800" b="0">
+                <a:solidFill>
+                  <a:srgbClr val="14243A"/>
+                </a:solidFill>
+                <a:latin typeface="Malgun Gothic"/>
+                <a:ea typeface="Malgun Gothic"/>
+                <a:cs typeface="Malgun Gothic"/>
+              </a:defRPr>
+            </a:lvl4pPr>
+            <a:lvl5pPr>
+              <a:defRPr sz="1800" b="0">
+                <a:solidFill>
+                  <a:srgbClr val="14243A"/>
+                </a:solidFill>
+                <a:latin typeface="Malgun Gothic"/>
+                <a:ea typeface="Malgun Gothic"/>
+                <a:cs typeface="Malgun Gothic"/>
+              </a:defRPr>
+            </a:lvl5pPr>
+            <a:lvl6pPr>
+              <a:defRPr sz="1800" b="0">
+                <a:solidFill>
+                  <a:srgbClr val="14243A"/>
+                </a:solidFill>
+                <a:latin typeface="Malgun Gothic"/>
+                <a:ea typeface="Malgun Gothic"/>
+                <a:cs typeface="Malgun Gothic"/>
+              </a:defRPr>
+            </a:lvl6pPr>
+            <a:lvl7pPr>
+              <a:defRPr sz="1800" b="0">
+                <a:solidFill>
+                  <a:srgbClr val="14243A"/>
+                </a:solidFill>
+                <a:latin typeface="Malgun Gothic"/>
+                <a:ea typeface="Malgun Gothic"/>
+                <a:cs typeface="Malgun Gothic"/>
+              </a:defRPr>
+            </a:lvl7pPr>
+            <a:lvl8pPr>
+              <a:defRPr sz="1800" b="0">
+                <a:solidFill>
+                  <a:srgbClr val="14243A"/>
+                </a:solidFill>
+                <a:latin typeface="Malgun Gothic"/>
+                <a:ea typeface="Malgun Gothic"/>
+                <a:cs typeface="Malgun Gothic"/>
+              </a:defRPr>
+            </a:lvl8pPr>
+            <a:lvl9pPr>
+              <a:defRPr sz="1800" b="0">
+                <a:solidFill>
+                  <a:srgbClr val="14243A"/>
+                </a:solidFill>
+                <a:latin typeface="Malgun Gothic"/>
+                <a:ea typeface="Malgun Gothic"/>
+                <a:cs typeface="Malgun Gothic"/>
+              </a:defRPr>
+            </a:lvl9pPr>
+          </a:lstStyle>
+          <a:p xmlns:a="http://schemas.openxmlformats.org/drawingml/2006/main">
+            <a:pPr>
+              <a:defRPr sz="1800" b="0">
+                <a:solidFill>
+                  <a:srgbClr val="14243A"/>
+                </a:solidFill>
+                <a:latin typeface="Malgun Gothic"/>
+                <a:ea typeface="Malgun Gothic"/>
+                <a:cs typeface="Malgun Gothic"/>
+              </a:defRPr>
+            </a:pPr>
+            <a:r>
+              <a:rPr sz="1800" b="0">
+                <a:solidFill>
+                  <a:srgbClr val="14243A"/>
+                </a:solidFill>
+                <a:latin typeface="Malgun Gothic"/>
+                <a:ea typeface="Malgun Gothic"/>
+                <a:cs typeface="Malgun Gothic"/>
+              </a:rPr>
+              <a:t>권성호 · Ph.D.</a:t>
             </a:r>
           </a:p>
         </p:txBody>
